--- a/TraxEco_IT_Inventory_Customs_Presentation.pptx
+++ b/TraxEco_IT_Inventory_Customs_Presentation.pptx
@@ -12,7 +12,6 @@
     <p:sldId id="260" r:id="rId11"/>
     <p:sldId id="261" r:id="rId12"/>
     <p:sldId id="262" r:id="rId13"/>
-    <p:sldId id="263" r:id="rId14"/>
   </p:sldIdLst>
   <p:sldSz cx="12191695" cy="6858000" type="screen4x3"/>
   <p:notesSz cx="6858000" cy="9144000"/>
@@ -3111,129 +3110,18 @@
         </p:nvSpPr>
         <p:spPr>
           <a:xfrm>
-            <a:off x="0" y="0"/>
-            <a:ext cx="12191695" cy="109728"/>
+            <a:off x="731520" y="1371600"/>
+            <a:ext cx="137160" cy="3840480"/>
           </a:xfrm>
           <a:prstGeom prst="rect">
             <a:avLst/>
           </a:prstGeom>
           <a:solidFill>
-            <a:srgbClr val="3BA55C"/>
-          </a:solidFill>
-          <a:ln>
-            <a:noFill/>
-          </a:ln>
-        </p:spPr>
-        <p:style>
-          <a:lnRef idx="1">
-            <a:schemeClr val="accent1"/>
-          </a:lnRef>
-          <a:fillRef idx="3">
-            <a:schemeClr val="accent1"/>
-          </a:fillRef>
-          <a:effectRef idx="2">
-            <a:schemeClr val="accent1"/>
-          </a:effectRef>
-          <a:fontRef idx="minor">
-            <a:schemeClr val="lt1"/>
-          </a:fontRef>
-        </p:style>
-        <p:txBody>
-          <a:bodyPr rtlCol="0" anchor="ctr"/>
-          <a:lstStyle/>
-          <a:p>
-            <a:pPr algn="ctr"/>
-          </a:p>
-        </p:txBody>
-      </p:sp>
-      <p:sp>
-        <p:nvSpPr>
-          <p:cNvPr id="3" name="TextBox 2"/>
-          <p:cNvSpPr txBox="1"/>
-          <p:nvPr/>
-        </p:nvSpPr>
-        <p:spPr>
-          <a:xfrm>
-            <a:off x="731520" y="1645920"/>
-            <a:ext cx="10698480" cy="3200400"/>
-          </a:xfrm>
-          <a:prstGeom prst="rect">
-            <a:avLst/>
-          </a:prstGeom>
-          <a:noFill/>
-        </p:spPr>
-        <p:txBody>
-          <a:bodyPr wrap="square">
-            <a:spAutoFit/>
-          </a:bodyPr>
-          <a:lstStyle/>
-          <a:p>
-            <a:pPr>
-              <a:defRPr sz="4000" b="1">
-                <a:solidFill>
-                  <a:srgbClr val="F1F5F9"/>
-                </a:solidFill>
-                <a:latin typeface="Arial"/>
-              </a:defRPr>
-            </a:pPr>
-            <a:r>
-              <a:t>TraxEco IT Inventory System</a:t>
-            </a:r>
-          </a:p>
-          <a:p>
-            <a:pPr>
-              <a:spcBef>
-                <a:spcPts val="1000"/>
-              </a:spcBef>
-              <a:defRPr sz="2000" b="1">
-                <a:solidFill>
-                  <a:srgbClr val="3BA55C"/>
-                </a:solidFill>
-                <a:latin typeface="Arial"/>
-              </a:defRPr>
-            </a:pPr>
-            <a:r>
-              <a:t>Indonesian Customs (Bea Cukai) Compliance &amp; INSW Integration</a:t>
-            </a:r>
-          </a:p>
-          <a:p>
-            <a:pPr>
-              <a:spcBef>
-                <a:spcPts val="1800"/>
-              </a:spcBef>
-              <a:defRPr sz="1300">
-                <a:solidFill>
-                  <a:srgbClr val="94A3B8"/>
-                </a:solidFill>
-                <a:latin typeface="Arial"/>
-              </a:defRPr>
-            </a:pPr>
-            <a:r>
-              <a:t>Live System Screenshot Deck  •  Bea Cukai PER-24/BC/2023 Specification</a:t>
-            </a:r>
-          </a:p>
-        </p:txBody>
-      </p:sp>
-      <p:sp>
-        <p:nvSpPr>
-          <p:cNvPr id="4" name="Rounded Rectangle 3"/>
-          <p:cNvSpPr/>
-          <p:nvPr/>
-        </p:nvSpPr>
-        <p:spPr>
-          <a:xfrm>
-            <a:off x="731520" y="5303520"/>
-            <a:ext cx="10728655" cy="777240"/>
-          </a:xfrm>
-          <a:prstGeom prst="roundRect">
-            <a:avLst/>
-          </a:prstGeom>
-          <a:solidFill>
-            <a:srgbClr val="1E293B"/>
+            <a:srgbClr val="10B981"/>
           </a:solidFill>
           <a:ln>
             <a:solidFill>
-              <a:srgbClr val="334155"/>
+              <a:srgbClr val="10B981"/>
             </a:solidFill>
           </a:ln>
         </p:spPr>
@@ -3261,14 +3149,14 @@
       </p:sp>
       <p:sp>
         <p:nvSpPr>
-          <p:cNvPr id="5" name="TextBox 4"/>
+          <p:cNvPr id="3" name="TextBox 2"/>
           <p:cNvSpPr txBox="1"/>
           <p:nvPr/>
         </p:nvSpPr>
         <p:spPr>
           <a:xfrm>
-            <a:off x="1005840" y="5440680"/>
-            <a:ext cx="10058400" cy="457200"/>
+            <a:off x="1097280" y="1371600"/>
+            <a:ext cx="10058400" cy="4114800"/>
           </a:xfrm>
           <a:prstGeom prst="rect">
             <a:avLst/>
@@ -3276,21 +3164,50 @@
           <a:noFill/>
         </p:spPr>
         <p:txBody>
-          <a:bodyPr wrap="none">
+          <a:bodyPr wrap="square">
             <a:spAutoFit/>
           </a:bodyPr>
           <a:lstStyle/>
           <a:p>
             <a:pPr>
-              <a:defRPr sz="1200" b="1">
-                <a:solidFill>
-                  <a:srgbClr val="F1F5F9"/>
-                </a:solidFill>
-                <a:latin typeface="Arial"/>
-              </a:defRPr>
-            </a:pPr>
-            <a:r>
-              <a:t>INSW API Gateway  |  PER-24/BC/2023  |  05:00 AM Daily Cut-off Window  |  Live App Captures</a:t>
+              <a:defRPr sz="3600" b="1">
+                <a:solidFill>
+                  <a:srgbClr val="FFFFFF"/>
+                </a:solidFill>
+                <a:latin typeface="Segoe UI"/>
+              </a:defRPr>
+            </a:pPr>
+            <a:r>
+              <a:t>🛡️ IT INVENTORY &amp; INSW SYSTEM</a:t>
+            </a:r>
+          </a:p>
+          <a:p>
+            <a:pPr>
+              <a:spcAft>
+                <a:spcPts val="2000"/>
+              </a:spcAft>
+              <a:defRPr sz="2000">
+                <a:solidFill>
+                  <a:srgbClr val="10B981"/>
+                </a:solidFill>
+                <a:latin typeface="Segoe UI"/>
+              </a:defRPr>
+            </a:pPr>
+            <a:r>
+              <a:t>Hệ thống Quản lý Kho IT Inventory &amp; Cổng Kết nối INSW Hải quan</a:t>
+            </a:r>
+          </a:p>
+          <a:p>
+            <a:pPr>
+              <a:defRPr sz="1400">
+                <a:solidFill>
+                  <a:srgbClr val="94A3B8"/>
+                </a:solidFill>
+                <a:latin typeface="Segoe UI"/>
+              </a:defRPr>
+            </a:pPr>
+            <a:r>
+              <a:t>Customs Compliance &amp; Executive Audit Presentation | Báo cáo Thuyết minh Hải quan</a:t>
             </a:r>
           </a:p>
         </p:txBody>
@@ -3330,7 +3247,7 @@
         <p:spPr>
           <a:xfrm>
             <a:off x="731520" y="365760"/>
-            <a:ext cx="10698480" cy="822960"/>
+            <a:ext cx="10728655" cy="822960"/>
           </a:xfrm>
           <a:prstGeom prst="rect">
             <a:avLst/>
@@ -3338,37 +3255,34 @@
           <a:noFill/>
         </p:spPr>
         <p:txBody>
-          <a:bodyPr wrap="square" lIns="0" tIns="0" rIns="0" bIns="0">
+          <a:bodyPr wrap="square" tIns="0" bIns="0">
             <a:spAutoFit/>
           </a:bodyPr>
           <a:lstStyle/>
           <a:p>
             <a:pPr>
-              <a:defRPr sz="2400" b="1">
-                <a:solidFill>
-                  <a:srgbClr val="0F172A"/>
-                </a:solidFill>
-                <a:latin typeface="Arial"/>
-              </a:defRPr>
-            </a:pPr>
-            <a:r>
-              <a:t>Executive Overview &amp; System Dashboard</a:t>
-            </a:r>
-          </a:p>
-          <a:p>
-            <a:pPr>
-              <a:spcBef>
-                <a:spcPts val="300"/>
-              </a:spcBef>
-              <a:defRPr sz="1300">
-                <a:solidFill>
-                  <a:srgbClr val="3BA55C"/>
-                </a:solidFill>
-                <a:latin typeface="Arial"/>
-              </a:defRPr>
-            </a:pPr>
-            <a:r>
-              <a:t>Live Application Command Center for Declarations &amp; Stock Tracking</a:t>
+              <a:defRPr sz="2200" b="1">
+                <a:solidFill>
+                  <a:srgbClr val="0F172A"/>
+                </a:solidFill>
+                <a:latin typeface="Segoe UI"/>
+              </a:defRPr>
+            </a:pPr>
+            <a:r>
+              <a:t>1. TỔNG QUAN HỆ THỐNG IT INVENTORY</a:t>
+            </a:r>
+          </a:p>
+          <a:p>
+            <a:pPr>
+              <a:defRPr sz="1300" b="1">
+                <a:solidFill>
+                  <a:srgbClr val="10B981"/>
+                </a:solidFill>
+                <a:latin typeface="Segoe UI"/>
+              </a:defRPr>
+            </a:pPr>
+            <a:r>
+              <a:t>1. SYSTEM OVERVIEW &amp; MATERIAL LIFECYCLE</a:t>
             </a:r>
           </a:p>
         </p:txBody>
@@ -3382,7 +3296,7 @@
         <p:spPr>
           <a:xfrm>
             <a:off x="731520" y="1371600"/>
-            <a:ext cx="3931920" cy="4937760"/>
+            <a:ext cx="5120640" cy="4754880"/>
           </a:xfrm>
           <a:prstGeom prst="roundRect">
             <a:avLst/>
@@ -3390,7 +3304,7 @@
           <a:solidFill>
             <a:srgbClr val="FFFFFF"/>
           </a:solidFill>
-          <a:ln w="12700">
+          <a:ln>
             <a:solidFill>
               <a:srgbClr val="E2E8F0"/>
             </a:solidFill>
@@ -3411,166 +3325,137 @@
           </a:fontRef>
         </p:style>
         <p:txBody>
-          <a:bodyPr rtlCol="0" anchor="ctr"/>
-          <a:lstStyle/>
-          <a:p>
-            <a:pPr algn="ctr"/>
-          </a:p>
-        </p:txBody>
-      </p:sp>
-      <p:sp>
-        <p:nvSpPr>
-          <p:cNvPr id="4" name="TextBox 3"/>
-          <p:cNvSpPr txBox="1"/>
+          <a:bodyPr rtlCol="0" anchor="ctr" wrap="square" tIns="274320" lIns="274320"/>
+          <a:lstStyle/>
+          <a:p>
+            <a:pPr algn="ctr">
+              <a:defRPr sz="1600" b="1">
+                <a:solidFill>
+                  <a:srgbClr val="2563EB"/>
+                </a:solidFill>
+                <a:latin typeface="Segoe UI"/>
+              </a:defRPr>
+            </a:pPr>
+            <a:r>
+              <a:t>🇻🇳 Tiếng Việt - Tổng quan Hệ thống</a:t>
+            </a:r>
+          </a:p>
+          <a:p>
+            <a:pPr>
+              <a:defRPr sz="1300">
+                <a:solidFill>
+                  <a:srgbClr val="0F172A"/>
+                </a:solidFill>
+                <a:latin typeface="Segoe UI"/>
+              </a:defRPr>
+            </a:pPr>
+            <a:r>
+              <a:t>Tích hợp trực tiếp với CSDL AXDB ERP của nhà máy.</a:t>
+            </a:r>
+          </a:p>
+          <a:p>
+            <a:pPr>
+              <a:defRPr sz="1300">
+                <a:solidFill>
+                  <a:srgbClr val="0F172A"/>
+                </a:solidFill>
+                <a:latin typeface="Segoe UI"/>
+              </a:defRPr>
+            </a:pPr>
+            <a:r>
+              <a:t>Tự động hóa toàn bộ vòng đời vật tư:</a:t>
+            </a:r>
+          </a:p>
+          <a:p>
+            <a:pPr>
+              <a:defRPr sz="1300">
+                <a:solidFill>
+                  <a:srgbClr val="0F172A"/>
+                </a:solidFill>
+                <a:latin typeface="Segoe UI"/>
+              </a:defRPr>
+            </a:pPr>
+            <a:r>
+              <a:t>   • Nhập mua NVL &amp; Phụ liệu (Purchase)</a:t>
+            </a:r>
+          </a:p>
+          <a:p>
+            <a:pPr>
+              <a:defRPr sz="1300">
+                <a:solidFill>
+                  <a:srgbClr val="0F172A"/>
+                </a:solidFill>
+                <a:latin typeface="Segoe UI"/>
+              </a:defRPr>
+            </a:pPr>
+            <a:r>
+              <a:t>   • Xuất NVL Sản xuất (WIP Line)</a:t>
+            </a:r>
+          </a:p>
+          <a:p>
+            <a:pPr>
+              <a:defRPr sz="1300">
+                <a:solidFill>
+                  <a:srgbClr val="0F172A"/>
+                </a:solidFill>
+                <a:latin typeface="Segoe UI"/>
+              </a:defRPr>
+            </a:pPr>
+            <a:r>
+              <a:t>   • Nhập kho Thành phẩm (Finished Goods)</a:t>
+            </a:r>
+          </a:p>
+          <a:p>
+            <a:pPr>
+              <a:defRPr sz="1300">
+                <a:solidFill>
+                  <a:srgbClr val="0F172A"/>
+                </a:solidFill>
+                <a:latin typeface="Segoe UI"/>
+              </a:defRPr>
+            </a:pPr>
+            <a:r>
+              <a:t>   • Báo phế &amp; Hao hụt (Scrap &amp; Loss)</a:t>
+            </a:r>
+          </a:p>
+          <a:p>
+            <a:pPr>
+              <a:defRPr sz="1300">
+                <a:solidFill>
+                  <a:srgbClr val="0F172A"/>
+                </a:solidFill>
+                <a:latin typeface="Segoe UI"/>
+              </a:defRPr>
+            </a:pPr>
+            <a:r>
+              <a:t>   • Kiểm kê &amp; Điều chỉnh kho (Stock Opname &amp; Movement)</a:t>
+            </a:r>
+          </a:p>
+          <a:p>
+            <a:pPr>
+              <a:defRPr sz="1300">
+                <a:solidFill>
+                  <a:srgbClr val="0F172A"/>
+                </a:solidFill>
+                <a:latin typeface="Segoe UI"/>
+              </a:defRPr>
+            </a:pPr>
+            <a:r>
+              <a:t>Đáp ứng 100% tiêu chuẩn minh bạch Hải quan.</a:t>
+            </a:r>
+          </a:p>
+        </p:txBody>
+      </p:sp>
+      <p:sp>
+        <p:nvSpPr>
+          <p:cNvPr id="4" name="Rounded Rectangle 3"/>
+          <p:cNvSpPr/>
           <p:nvPr/>
         </p:nvSpPr>
         <p:spPr>
           <a:xfrm>
-            <a:off x="960120" y="1600200"/>
-            <a:ext cx="3474720" cy="4480560"/>
-          </a:xfrm>
-          <a:prstGeom prst="rect">
-            <a:avLst/>
-          </a:prstGeom>
-          <a:noFill/>
-        </p:spPr>
-        <p:txBody>
-          <a:bodyPr wrap="square" lIns="0" tIns="0" rIns="0" bIns="0">
-            <a:spAutoFit/>
-          </a:bodyPr>
-          <a:lstStyle/>
-          <a:p>
-            <a:pPr>
-              <a:spcAft>
-                <a:spcPts val="1200"/>
-              </a:spcAft>
-              <a:defRPr sz="1600" b="1">
-                <a:solidFill>
-                  <a:srgbClr val="0F172A"/>
-                </a:solidFill>
-                <a:latin typeface="Arial"/>
-              </a:defRPr>
-            </a:pPr>
-            <a:r>
-              <a:t>System Highlights</a:t>
-            </a:r>
-          </a:p>
-          <a:p>
-            <a:pPr>
-              <a:spcAft>
-                <a:spcPts val="1000"/>
-              </a:spcAft>
-              <a:defRPr sz="1200">
-                <a:latin typeface="Arial"/>
-              </a:defRPr>
-            </a:pPr>
-            <a:r>
-              <a:rPr b="1">
-                <a:solidFill>
-                  <a:srgbClr val="0F172A"/>
-                </a:solidFill>
-              </a:rPr>
-              <a:t>✔  PER-24/BC/2023: </a:t>
-            </a:r>
-            <a:r>
-              <a:rPr>
-                <a:solidFill>
-                  <a:srgbClr val="64748B"/>
-                </a:solidFill>
-              </a:rPr>
-              <a:t>100% compliant with Bea Cukai mandatory schemas.</a:t>
-            </a:r>
-          </a:p>
-          <a:p>
-            <a:pPr>
-              <a:spcAft>
-                <a:spcPts val="1000"/>
-              </a:spcAft>
-              <a:defRPr sz="1200">
-                <a:latin typeface="Arial"/>
-              </a:defRPr>
-            </a:pPr>
-            <a:r>
-              <a:rPr b="1">
-                <a:solidFill>
-                  <a:srgbClr val="0F172A"/>
-                </a:solidFill>
-              </a:rPr>
-              <a:t>✔  Real-time Metrics: </a:t>
-            </a:r>
-            <a:r>
-              <a:rPr>
-                <a:solidFill>
-                  <a:srgbClr val="64748B"/>
-                </a:solidFill>
-              </a:rPr>
-              <a:t>Instant tracking of inbound, outbound &amp; pending files.</a:t>
-            </a:r>
-          </a:p>
-          <a:p>
-            <a:pPr>
-              <a:spcAft>
-                <a:spcPts val="1000"/>
-              </a:spcAft>
-              <a:defRPr sz="1200">
-                <a:latin typeface="Arial"/>
-              </a:defRPr>
-            </a:pPr>
-            <a:r>
-              <a:rPr b="1">
-                <a:solidFill>
-                  <a:srgbClr val="0F172A"/>
-                </a:solidFill>
-              </a:rPr>
-              <a:t>✔  AXDB ERP Sync: </a:t>
-            </a:r>
-            <a:r>
-              <a:rPr>
-                <a:solidFill>
-                  <a:srgbClr val="64748B"/>
-                </a:solidFill>
-              </a:rPr>
-              <a:t>Direct connection to enterprise ERP database.</a:t>
-            </a:r>
-          </a:p>
-          <a:p>
-            <a:pPr>
-              <a:spcAft>
-                <a:spcPts val="1000"/>
-              </a:spcAft>
-              <a:defRPr sz="1200">
-                <a:latin typeface="Arial"/>
-              </a:defRPr>
-            </a:pPr>
-            <a:r>
-              <a:rPr b="1">
-                <a:solidFill>
-                  <a:srgbClr val="0F172A"/>
-                </a:solidFill>
-              </a:rPr>
-              <a:t>✔  05:00 AM Cut-off: </a:t>
-            </a:r>
-            <a:r>
-              <a:rPr>
-                <a:solidFill>
-                  <a:srgbClr val="64748B"/>
-                </a:solidFill>
-              </a:rPr>
-              <a:t>Automated daily operational audit window.</a:t>
-            </a:r>
-          </a:p>
-        </p:txBody>
-      </p:sp>
-      <p:sp>
-        <p:nvSpPr>
-          <p:cNvPr id="5" name="Rounded Rectangle 4"/>
-          <p:cNvSpPr/>
-          <p:nvPr/>
-        </p:nvSpPr>
-        <p:spPr>
-          <a:xfrm>
-            <a:off x="4846320" y="1371600"/>
-            <a:ext cx="6583680" cy="4937760"/>
+            <a:off x="6248095" y="1371600"/>
+            <a:ext cx="5120640" cy="4754880"/>
           </a:xfrm>
           <a:prstGeom prst="roundRect">
             <a:avLst/>
@@ -3578,7 +3463,7 @@
           <a:solidFill>
             <a:srgbClr val="FFFFFF"/>
           </a:solidFill>
-          <a:ln w="19050">
+          <a:ln>
             <a:solidFill>
               <a:srgbClr val="E2E8F0"/>
             </a:solidFill>
@@ -3599,37 +3484,127 @@
           </a:fontRef>
         </p:style>
         <p:txBody>
-          <a:bodyPr rtlCol="0" anchor="ctr"/>
-          <a:lstStyle/>
-          <a:p>
-            <a:pPr algn="ctr"/>
-          </a:p>
-        </p:txBody>
-      </p:sp>
-      <p:pic>
-        <p:nvPicPr>
-          <p:cNvPr id="6" name="Picture 5" descr="perfect_dashboard.png"/>
-          <p:cNvPicPr>
-            <a:picLocks noChangeAspect="1"/>
-          </p:cNvPicPr>
-          <p:nvPr/>
-        </p:nvPicPr>
-        <p:blipFill>
-          <a:blip r:embed="rId2"/>
-          <a:stretch>
-            <a:fillRect/>
-          </a:stretch>
-        </p:blipFill>
-        <p:spPr>
-          <a:xfrm>
-            <a:off x="4919472" y="2216912"/>
-            <a:ext cx="6437376" cy="3247136"/>
-          </a:xfrm>
-          <a:prstGeom prst="rect">
-            <a:avLst/>
-          </a:prstGeom>
-        </p:spPr>
-      </p:pic>
+          <a:bodyPr rtlCol="0" anchor="ctr" wrap="square" tIns="274320" lIns="274320"/>
+          <a:lstStyle/>
+          <a:p>
+            <a:pPr algn="ctr">
+              <a:defRPr sz="1600" b="1">
+                <a:solidFill>
+                  <a:srgbClr val="10B981"/>
+                </a:solidFill>
+                <a:latin typeface="Segoe UI"/>
+              </a:defRPr>
+            </a:pPr>
+            <a:r>
+              <a:t>🇬🇧 English - System Overview</a:t>
+            </a:r>
+          </a:p>
+          <a:p>
+            <a:pPr>
+              <a:defRPr sz="1300">
+                <a:solidFill>
+                  <a:srgbClr val="0F172A"/>
+                </a:solidFill>
+                <a:latin typeface="Segoe UI"/>
+              </a:defRPr>
+            </a:pPr>
+            <a:r>
+              <a:t>Direct integration with Factory AXDB ERP Database.</a:t>
+            </a:r>
+          </a:p>
+          <a:p>
+            <a:pPr>
+              <a:defRPr sz="1300">
+                <a:solidFill>
+                  <a:srgbClr val="0F172A"/>
+                </a:solidFill>
+                <a:latin typeface="Segoe UI"/>
+              </a:defRPr>
+            </a:pPr>
+            <a:r>
+              <a:t>Automates the entire material lifecycle:</a:t>
+            </a:r>
+          </a:p>
+          <a:p>
+            <a:pPr>
+              <a:defRPr sz="1300">
+                <a:solidFill>
+                  <a:srgbClr val="0F172A"/>
+                </a:solidFill>
+                <a:latin typeface="Segoe UI"/>
+              </a:defRPr>
+            </a:pPr>
+            <a:r>
+              <a:t>   • Raw Material &amp; Accessories Purchase</a:t>
+            </a:r>
+          </a:p>
+          <a:p>
+            <a:pPr>
+              <a:defRPr sz="1300">
+                <a:solidFill>
+                  <a:srgbClr val="0F172A"/>
+                </a:solidFill>
+                <a:latin typeface="Segoe UI"/>
+              </a:defRPr>
+            </a:pPr>
+            <a:r>
+              <a:t>   • Work-In-Progress Issue (WIP Line)</a:t>
+            </a:r>
+          </a:p>
+          <a:p>
+            <a:pPr>
+              <a:defRPr sz="1300">
+                <a:solidFill>
+                  <a:srgbClr val="0F172A"/>
+                </a:solidFill>
+                <a:latin typeface="Segoe UI"/>
+              </a:defRPr>
+            </a:pPr>
+            <a:r>
+              <a:t>   • Finished Goods Receiving (FG)</a:t>
+            </a:r>
+          </a:p>
+          <a:p>
+            <a:pPr>
+              <a:defRPr sz="1300">
+                <a:solidFill>
+                  <a:srgbClr val="0F172A"/>
+                </a:solidFill>
+                <a:latin typeface="Segoe UI"/>
+              </a:defRPr>
+            </a:pPr>
+            <a:r>
+              <a:t>   • Scrap &amp; Loss Disposal</a:t>
+            </a:r>
+          </a:p>
+          <a:p>
+            <a:pPr>
+              <a:defRPr sz="1300">
+                <a:solidFill>
+                  <a:srgbClr val="0F172A"/>
+                </a:solidFill>
+                <a:latin typeface="Segoe UI"/>
+              </a:defRPr>
+            </a:pPr>
+            <a:r>
+              <a:t>   • Stock Opname &amp; Movement Adjustments</a:t>
+            </a:r>
+          </a:p>
+          <a:p>
+            <a:pPr>
+              <a:defRPr sz="1300">
+                <a:solidFill>
+                  <a:srgbClr val="0F172A"/>
+                </a:solidFill>
+                <a:latin typeface="Segoe UI"/>
+              </a:defRPr>
+            </a:pPr>
+            <a:r>
+              <a:t>100% compliant with Customs auditability standards.</a:t>
+            </a:r>
+          </a:p>
+        </p:txBody>
+      </p:sp>
     </p:spTree>
   </p:cSld>
   <p:clrMapOvr>
@@ -3665,7 +3640,7 @@
         <p:spPr>
           <a:xfrm>
             <a:off x="731520" y="365760"/>
-            <a:ext cx="10698480" cy="822960"/>
+            <a:ext cx="10728655" cy="822960"/>
           </a:xfrm>
           <a:prstGeom prst="rect">
             <a:avLst/>
@@ -3673,37 +3648,34 @@
           <a:noFill/>
         </p:spPr>
         <p:txBody>
-          <a:bodyPr wrap="square" lIns="0" tIns="0" rIns="0" bIns="0">
+          <a:bodyPr wrap="square" tIns="0" bIns="0">
             <a:spAutoFit/>
           </a:bodyPr>
           <a:lstStyle/>
           <a:p>
             <a:pPr>
-              <a:defRPr sz="2400" b="1">
-                <a:solidFill>
-                  <a:srgbClr val="0F172A"/>
-                </a:solidFill>
-                <a:latin typeface="Arial"/>
-              </a:defRPr>
-            </a:pPr>
-            <a:r>
-              <a:t>Daftar Barang Master (Customs Item Master)</a:t>
-            </a:r>
-          </a:p>
-          <a:p>
-            <a:pPr>
-              <a:spcBef>
-                <a:spcPts val="300"/>
-              </a:spcBef>
-              <a:defRPr sz="1300">
-                <a:solidFill>
-                  <a:srgbClr val="3BA55C"/>
-                </a:solidFill>
-                <a:latin typeface="Arial"/>
-              </a:defRPr>
-            </a:pPr>
-            <a:r>
-              <a:t>Live Master Item Aggregator with Automated Categories 1 to 8</a:t>
+              <a:defRPr sz="2200" b="1">
+                <a:solidFill>
+                  <a:srgbClr val="0F172A"/>
+                </a:solidFill>
+                <a:latin typeface="Segoe UI"/>
+              </a:defRPr>
+            </a:pPr>
+            <a:r>
+              <a:t>2. CHUẨN HÓA 11 TRƯỜNG DỮ LIỆU HẢI QUAN BẮT BUỘC</a:t>
+            </a:r>
+          </a:p>
+          <a:p>
+            <a:pPr>
+              <a:defRPr sz="1300" b="1">
+                <a:solidFill>
+                  <a:srgbClr val="10B981"/>
+                </a:solidFill>
+                <a:latin typeface="Segoe UI"/>
+              </a:defRPr>
+            </a:pPr>
+            <a:r>
+              <a:t>2. MANDATORY 11 CUSTOMS DATA FIELDS STANDARDIZATION</a:t>
             </a:r>
           </a:p>
         </p:txBody>
@@ -3717,7 +3689,7 @@
         <p:spPr>
           <a:xfrm>
             <a:off x="731520" y="1371600"/>
-            <a:ext cx="3931920" cy="4937760"/>
+            <a:ext cx="5120640" cy="4754880"/>
           </a:xfrm>
           <a:prstGeom prst="roundRect">
             <a:avLst/>
@@ -3725,7 +3697,7 @@
           <a:solidFill>
             <a:srgbClr val="FFFFFF"/>
           </a:solidFill>
-          <a:ln w="12700">
+          <a:ln>
             <a:solidFill>
               <a:srgbClr val="E2E8F0"/>
             </a:solidFill>
@@ -3746,166 +3718,111 @@
           </a:fontRef>
         </p:style>
         <p:txBody>
-          <a:bodyPr rtlCol="0" anchor="ctr"/>
-          <a:lstStyle/>
-          <a:p>
-            <a:pPr algn="ctr"/>
-          </a:p>
-        </p:txBody>
-      </p:sp>
-      <p:sp>
-        <p:nvSpPr>
-          <p:cNvPr id="4" name="TextBox 3"/>
-          <p:cNvSpPr txBox="1"/>
+          <a:bodyPr rtlCol="0" anchor="ctr" wrap="square" tIns="274320" lIns="274320"/>
+          <a:lstStyle/>
+          <a:p>
+            <a:pPr algn="ctr">
+              <a:defRPr sz="1600" b="1">
+                <a:solidFill>
+                  <a:srgbClr val="2563EB"/>
+                </a:solidFill>
+                <a:latin typeface="Segoe UI"/>
+              </a:defRPr>
+            </a:pPr>
+            <a:r>
+              <a:t>📋 Các trường thông tin 1 - 6</a:t>
+            </a:r>
+          </a:p>
+          <a:p>
+            <a:pPr>
+              <a:defRPr sz="1300">
+                <a:solidFill>
+                  <a:srgbClr val="0F172A"/>
+                </a:solidFill>
+                <a:latin typeface="Segoe UI"/>
+              </a:defRPr>
+            </a:pPr>
+            <a:r>
+              <a:t>1. Mã / Số chứng từ kho (nomorDokKegiatan)</a:t>
+            </a:r>
+          </a:p>
+          <a:p>
+            <a:pPr>
+              <a:defRPr sz="1300">
+                <a:solidFill>
+                  <a:srgbClr val="0F172A"/>
+                </a:solidFill>
+                <a:latin typeface="Segoe UI"/>
+              </a:defRPr>
+            </a:pPr>
+            <a:r>
+              <a:t>2. Ngày giờ thực tế phát sinh (thoiGianThucTe)</a:t>
+            </a:r>
+          </a:p>
+          <a:p>
+            <a:pPr>
+              <a:defRPr sz="1300">
+                <a:solidFill>
+                  <a:srgbClr val="0F172A"/>
+                </a:solidFill>
+                <a:latin typeface="Segoe UI"/>
+              </a:defRPr>
+            </a:pPr>
+            <a:r>
+              <a:t>3. Ngày chốt sổ báo cáo Cutoff 5AM</a:t>
+            </a:r>
+          </a:p>
+          <a:p>
+            <a:pPr>
+              <a:defRPr sz="1300">
+                <a:solidFill>
+                  <a:srgbClr val="0F172A"/>
+                </a:solidFill>
+                <a:latin typeface="Segoe UI"/>
+              </a:defRPr>
+            </a:pPr>
+            <a:r>
+              <a:t>4. Loại giao dịch AX (loaiGiaoDichAX)</a:t>
+            </a:r>
+          </a:p>
+          <a:p>
+            <a:pPr>
+              <a:defRPr sz="1300">
+                <a:solidFill>
+                  <a:srgbClr val="0F172A"/>
+                </a:solidFill>
+                <a:latin typeface="Segoe UI"/>
+              </a:defRPr>
+            </a:pPr>
+            <a:r>
+              <a:t>5. Mã vật tư / Mã nguyên liệu (kdBarang)</a:t>
+            </a:r>
+          </a:p>
+          <a:p>
+            <a:pPr>
+              <a:defRPr sz="1300">
+                <a:solidFill>
+                  <a:srgbClr val="0F172A"/>
+                </a:solidFill>
+                <a:latin typeface="Segoe UI"/>
+              </a:defRPr>
+            </a:pPr>
+            <a:r>
+              <a:t>6. Tên mô tả chi tiết hàng hóa (uraianBarang)</a:t>
+            </a:r>
+          </a:p>
+        </p:txBody>
+      </p:sp>
+      <p:sp>
+        <p:nvSpPr>
+          <p:cNvPr id="4" name="Rounded Rectangle 3"/>
+          <p:cNvSpPr/>
           <p:nvPr/>
         </p:nvSpPr>
         <p:spPr>
           <a:xfrm>
-            <a:off x="960120" y="1600200"/>
-            <a:ext cx="3474720" cy="4480560"/>
-          </a:xfrm>
-          <a:prstGeom prst="rect">
-            <a:avLst/>
-          </a:prstGeom>
-          <a:noFill/>
-        </p:spPr>
-        <p:txBody>
-          <a:bodyPr wrap="square" lIns="0" tIns="0" rIns="0" bIns="0">
-            <a:spAutoFit/>
-          </a:bodyPr>
-          <a:lstStyle/>
-          <a:p>
-            <a:pPr>
-              <a:spcAft>
-                <a:spcPts val="1200"/>
-              </a:spcAft>
-              <a:defRPr sz="1600" b="1">
-                <a:solidFill>
-                  <a:srgbClr val="0F172A"/>
-                </a:solidFill>
-                <a:latin typeface="Arial"/>
-              </a:defRPr>
-            </a:pPr>
-            <a:r>
-              <a:t>Master Data Features</a:t>
-            </a:r>
-          </a:p>
-          <a:p>
-            <a:pPr>
-              <a:spcAft>
-                <a:spcPts val="1000"/>
-              </a:spcAft>
-              <a:defRPr sz="1200">
-                <a:latin typeface="Arial"/>
-              </a:defRPr>
-            </a:pPr>
-            <a:r>
-              <a:rPr b="1">
-                <a:solidFill>
-                  <a:srgbClr val="0F172A"/>
-                </a:solidFill>
-              </a:rPr>
-              <a:t>✔  Unique Aggregation: </a:t>
-            </a:r>
-            <a:r>
-              <a:rPr>
-                <a:solidFill>
-                  <a:srgbClr val="64748B"/>
-                </a:solidFill>
-              </a:rPr>
-              <a:t>Deduplicates Kode Barang across all declarations.</a:t>
-            </a:r>
-          </a:p>
-          <a:p>
-            <a:pPr>
-              <a:spcAft>
-                <a:spcPts val="1000"/>
-              </a:spcAft>
-              <a:defRPr sz="1200">
-                <a:latin typeface="Arial"/>
-              </a:defRPr>
-            </a:pPr>
-            <a:r>
-              <a:rPr b="1">
-                <a:solidFill>
-                  <a:srgbClr val="0F172A"/>
-                </a:solidFill>
-              </a:rPr>
-              <a:t>✔  Kategori 1 - 8 Badges: </a:t>
-            </a:r>
-            <a:r>
-              <a:rPr>
-                <a:solidFill>
-                  <a:srgbClr val="64748B"/>
-                </a:solidFill>
-              </a:rPr>
-              <a:t>Visual badges for Mesin, Bahan Baku, Produksi, Scrap, WIP.</a:t>
-            </a:r>
-          </a:p>
-          <a:p>
-            <a:pPr>
-              <a:spcAft>
-                <a:spcPts val="1000"/>
-              </a:spcAft>
-              <a:defRPr sz="1200">
-                <a:latin typeface="Arial"/>
-              </a:defRPr>
-            </a:pPr>
-            <a:r>
-              <a:rPr b="1">
-                <a:solidFill>
-                  <a:srgbClr val="0F172A"/>
-                </a:solidFill>
-              </a:rPr>
-              <a:t>✔  Auditor Filter: </a:t>
-            </a:r>
-            <a:r>
-              <a:rPr>
-                <a:solidFill>
-                  <a:srgbClr val="64748B"/>
-                </a:solidFill>
-              </a:rPr>
-              <a:t>Dropdown filter for Bea Cukai category inspection.</a:t>
-            </a:r>
-          </a:p>
-          <a:p>
-            <a:pPr>
-              <a:spcAft>
-                <a:spcPts val="1000"/>
-              </a:spcAft>
-              <a:defRPr sz="1200">
-                <a:latin typeface="Arial"/>
-              </a:defRPr>
-            </a:pPr>
-            <a:r>
-              <a:rPr b="1">
-                <a:solidFill>
-                  <a:srgbClr val="0F172A"/>
-                </a:solidFill>
-              </a:rPr>
-              <a:t>✔  Sticky Header: </a:t>
-            </a:r>
-            <a:r>
-              <a:rPr>
-                <a:solidFill>
-                  <a:srgbClr val="64748B"/>
-                </a:solidFill>
-              </a:rPr>
-              <a:t>Seamless scrolling with numbered page buttons.</a:t>
-            </a:r>
-          </a:p>
-        </p:txBody>
-      </p:sp>
-      <p:sp>
-        <p:nvSpPr>
-          <p:cNvPr id="5" name="Rounded Rectangle 4"/>
-          <p:cNvSpPr/>
-          <p:nvPr/>
-        </p:nvSpPr>
-        <p:spPr>
-          <a:xfrm>
-            <a:off x="4846320" y="1371600"/>
-            <a:ext cx="6583680" cy="4937760"/>
+            <a:off x="6248095" y="1371600"/>
+            <a:ext cx="5120640" cy="4754880"/>
           </a:xfrm>
           <a:prstGeom prst="roundRect">
             <a:avLst/>
@@ -3913,7 +3830,7 @@
           <a:solidFill>
             <a:srgbClr val="FFFFFF"/>
           </a:solidFill>
-          <a:ln w="19050">
+          <a:ln>
             <a:solidFill>
               <a:srgbClr val="E2E8F0"/>
             </a:solidFill>
@@ -3934,37 +3851,101 @@
           </a:fontRef>
         </p:style>
         <p:txBody>
-          <a:bodyPr rtlCol="0" anchor="ctr"/>
-          <a:lstStyle/>
-          <a:p>
-            <a:pPr algn="ctr"/>
-          </a:p>
-        </p:txBody>
-      </p:sp>
-      <p:pic>
-        <p:nvPicPr>
-          <p:cNvPr id="6" name="Picture 5" descr="perfect_master_data.png"/>
-          <p:cNvPicPr>
-            <a:picLocks noChangeAspect="1"/>
-          </p:cNvPicPr>
-          <p:nvPr/>
-        </p:nvPicPr>
-        <p:blipFill>
-          <a:blip r:embed="rId2"/>
-          <a:stretch>
-            <a:fillRect/>
-          </a:stretch>
-        </p:blipFill>
-        <p:spPr>
-          <a:xfrm>
-            <a:off x="4919472" y="2216912"/>
-            <a:ext cx="6437376" cy="3247136"/>
-          </a:xfrm>
-          <a:prstGeom prst="rect">
-            <a:avLst/>
-          </a:prstGeom>
-        </p:spPr>
-      </p:pic>
+          <a:bodyPr rtlCol="0" anchor="ctr" wrap="square" tIns="274320" lIns="274320"/>
+          <a:lstStyle/>
+          <a:p>
+            <a:pPr algn="ctr">
+              <a:defRPr sz="1600" b="1">
+                <a:solidFill>
+                  <a:srgbClr val="10B981"/>
+                </a:solidFill>
+                <a:latin typeface="Segoe UI"/>
+              </a:defRPr>
+            </a:pPr>
+            <a:r>
+              <a:t>📋 Các trường thông tin 7 - 11</a:t>
+            </a:r>
+          </a:p>
+          <a:p>
+            <a:pPr>
+              <a:defRPr sz="1300">
+                <a:solidFill>
+                  <a:srgbClr val="0F172A"/>
+                </a:solidFill>
+                <a:latin typeface="Segoe UI"/>
+              </a:defRPr>
+            </a:pPr>
+            <a:r>
+              <a:t>7. Mã HS Code Hải quan (hsCode)</a:t>
+            </a:r>
+          </a:p>
+          <a:p>
+            <a:pPr>
+              <a:defRPr sz="1300">
+                <a:solidFill>
+                  <a:srgbClr val="0F172A"/>
+                </a:solidFill>
+                <a:latin typeface="Segoe UI"/>
+              </a:defRPr>
+            </a:pPr>
+            <a:r>
+              <a:t>8. Số lượng xuất / nhập / tồn (jumlah)</a:t>
+            </a:r>
+          </a:p>
+          <a:p>
+            <a:pPr>
+              <a:defRPr sz="1300">
+                <a:solidFill>
+                  <a:srgbClr val="0F172A"/>
+                </a:solidFill>
+                <a:latin typeface="Segoe UI"/>
+              </a:defRPr>
+            </a:pPr>
+            <a:r>
+              <a:t>9. Đơn vị tính chuẩn Hải quan (kdSatuan: PCS, YRD, KGM...)</a:t>
+            </a:r>
+          </a:p>
+          <a:p>
+            <a:pPr>
+              <a:defRPr sz="1300">
+                <a:solidFill>
+                  <a:srgbClr val="0F172A"/>
+                </a:solidFill>
+                <a:latin typeface="Segoe UI"/>
+              </a:defRPr>
+            </a:pPr>
+            <a:r>
+              <a:t>10. Trị giá ghi sổ kế toán kho (nilai)</a:t>
+            </a:r>
+          </a:p>
+          <a:p>
+            <a:pPr>
+              <a:defRPr sz="1300">
+                <a:solidFill>
+                  <a:srgbClr val="0F172A"/>
+                </a:solidFill>
+                <a:latin typeface="Segoe UI"/>
+              </a:defRPr>
+            </a:pPr>
+            <a:r>
+              <a:t>11. Mã kho &amp; Vị trí thực tế (kho / INVENTLOCATIONID)</a:t>
+            </a:r>
+          </a:p>
+          <a:p>
+            <a:pPr>
+              <a:defRPr sz="1300">
+                <a:solidFill>
+                  <a:srgbClr val="0F172A"/>
+                </a:solidFill>
+                <a:latin typeface="Segoe UI"/>
+              </a:defRPr>
+            </a:pPr>
+            <a:r>
+              <a:t>✔️ Đảm bảo minh bạch 100% khi Hải quan đối soát</a:t>
+            </a:r>
+          </a:p>
+        </p:txBody>
+      </p:sp>
     </p:spTree>
   </p:cSld>
   <p:clrMapOvr>
@@ -4000,7 +3981,7 @@
         <p:spPr>
           <a:xfrm>
             <a:off x="731520" y="365760"/>
-            <a:ext cx="10698480" cy="822960"/>
+            <a:ext cx="10728655" cy="822960"/>
           </a:xfrm>
           <a:prstGeom prst="rect">
             <a:avLst/>
@@ -4008,37 +3989,34 @@
           <a:noFill/>
         </p:spPr>
         <p:txBody>
-          <a:bodyPr wrap="square" lIns="0" tIns="0" rIns="0" bIns="0">
+          <a:bodyPr wrap="square" tIns="0" bIns="0">
             <a:spAutoFit/>
           </a:bodyPr>
           <a:lstStyle/>
           <a:p>
             <a:pPr>
-              <a:defRPr sz="2400" b="1">
-                <a:solidFill>
-                  <a:srgbClr val="0F172A"/>
-                </a:solidFill>
-                <a:latin typeface="Arial"/>
-              </a:defRPr>
-            </a:pPr>
-            <a:r>
-              <a:t>Pemasukan &amp; Pengeluaran (Automated PDF Import)</a:t>
-            </a:r>
-          </a:p>
-          <a:p>
-            <a:pPr>
-              <a:spcBef>
-                <a:spcPts val="300"/>
-              </a:spcBef>
-              <a:defRPr sz="1300">
-                <a:solidFill>
-                  <a:srgbClr val="3BA55C"/>
-                </a:solidFill>
-                <a:latin typeface="Arial"/>
-              </a:defRPr>
-            </a:pPr>
-            <a:r>
-              <a:t>Live Vector OCR Extractor &amp; 3-Layer Category Classifier</a:t>
+              <a:defRPr sz="2200" b="1">
+                <a:solidFill>
+                  <a:srgbClr val="0F172A"/>
+                </a:solidFill>
+                <a:latin typeface="Segoe UI"/>
+              </a:defRPr>
+            </a:pPr>
+            <a:r>
+              <a:t>3. QUY CHUẨN CHỐT SỔ CA ĐÊM 5:00 AM (AXDB CUTOFF)</a:t>
+            </a:r>
+          </a:p>
+          <a:p>
+            <a:pPr>
+              <a:defRPr sz="1300" b="1">
+                <a:solidFill>
+                  <a:srgbClr val="10B981"/>
+                </a:solidFill>
+                <a:latin typeface="Segoe UI"/>
+              </a:defRPr>
+            </a:pPr>
+            <a:r>
+              <a:t>3. 5:00 AM SHIFT CUTOFF REPORTING STANDARD</a:t>
             </a:r>
           </a:p>
         </p:txBody>
@@ -4052,7 +4030,7 @@
         <p:spPr>
           <a:xfrm>
             <a:off x="731520" y="1371600"/>
-            <a:ext cx="3931920" cy="4937760"/>
+            <a:ext cx="5120640" cy="4754880"/>
           </a:xfrm>
           <a:prstGeom prst="roundRect">
             <a:avLst/>
@@ -4060,7 +4038,7 @@
           <a:solidFill>
             <a:srgbClr val="FFFFFF"/>
           </a:solidFill>
-          <a:ln w="12700">
+          <a:ln>
             <a:solidFill>
               <a:srgbClr val="E2E8F0"/>
             </a:solidFill>
@@ -4081,166 +4059,111 @@
           </a:fontRef>
         </p:style>
         <p:txBody>
-          <a:bodyPr rtlCol="0" anchor="ctr"/>
-          <a:lstStyle/>
-          <a:p>
-            <a:pPr algn="ctr"/>
-          </a:p>
-        </p:txBody>
-      </p:sp>
-      <p:sp>
-        <p:nvSpPr>
-          <p:cNvPr id="4" name="TextBox 3"/>
-          <p:cNvSpPr txBox="1"/>
+          <a:bodyPr rtlCol="0" anchor="ctr" wrap="square" tIns="274320" lIns="274320"/>
+          <a:lstStyle/>
+          <a:p>
+            <a:pPr algn="ctr">
+              <a:defRPr sz="1600" b="1">
+                <a:solidFill>
+                  <a:srgbClr val="0F172A"/>
+                </a:solidFill>
+                <a:latin typeface="Segoe UI"/>
+              </a:defRPr>
+            </a:pPr>
+            <a:r>
+              <a:t>🇻🇳 Giải trình Quy trình Chốt sổ 5:00 AM</a:t>
+            </a:r>
+          </a:p>
+          <a:p>
+            <a:pPr>
+              <a:defRPr sz="1300">
+                <a:solidFill>
+                  <a:srgbClr val="0F172A"/>
+                </a:solidFill>
+                <a:latin typeface="Segoe UI"/>
+              </a:defRPr>
+            </a:pPr>
+            <a:r>
+              <a:t>Đặc thù nhà máy có ca làm việc đêm kéo dài qua 12h đêm.</a:t>
+            </a:r>
+          </a:p>
+          <a:p>
+            <a:pPr>
+              <a:defRPr sz="1300">
+                <a:solidFill>
+                  <a:srgbClr val="0F172A"/>
+                </a:solidFill>
+                <a:latin typeface="Segoe UI"/>
+              </a:defRPr>
+            </a:pPr>
+            <a:r>
+              <a:t>Nếu chốt mốc 00:00h sẽ làm sai lệch ngày kế toán kho ca đêm.</a:t>
+            </a:r>
+          </a:p>
+          <a:p>
+            <a:pPr>
+              <a:defRPr sz="1300">
+                <a:solidFill>
+                  <a:srgbClr val="0F172A"/>
+                </a:solidFill>
+                <a:latin typeface="Segoe UI"/>
+              </a:defRPr>
+            </a:pPr>
+            <a:r>
+              <a:t>Hệ thống tích hợp công thức Cutoff 5:00 AM:</a:t>
+            </a:r>
+          </a:p>
+          <a:p>
+            <a:pPr>
+              <a:defRPr sz="1300">
+                <a:solidFill>
+                  <a:srgbClr val="0F172A"/>
+                </a:solidFill>
+                <a:latin typeface="Segoe UI"/>
+              </a:defRPr>
+            </a:pPr>
+            <a:r>
+              <a:t>   DATEADD(hour, -5, t.MODIFIEDDATETIME)</a:t>
+            </a:r>
+          </a:p>
+          <a:p>
+            <a:pPr>
+              <a:defRPr sz="1300">
+                <a:solidFill>
+                  <a:srgbClr val="0F172A"/>
+                </a:solidFill>
+                <a:latin typeface="Segoe UI"/>
+              </a:defRPr>
+            </a:pPr>
+            <a:r>
+              <a:t>Khung giờ chốt: 05:00:00 sáng hôm nay -&gt; 05:00:00 sáng hôm sau.</a:t>
+            </a:r>
+          </a:p>
+          <a:p>
+            <a:pPr>
+              <a:defRPr sz="1300">
+                <a:solidFill>
+                  <a:srgbClr val="0F172A"/>
+                </a:solidFill>
+                <a:latin typeface="Segoe UI"/>
+              </a:defRPr>
+            </a:pPr>
+            <a:r>
+              <a:t>Đảm bảo khớp 100% số liệu kiểm kê thực tế tại nhà máy.</a:t>
+            </a:r>
+          </a:p>
+        </p:txBody>
+      </p:sp>
+      <p:sp>
+        <p:nvSpPr>
+          <p:cNvPr id="4" name="Rounded Rectangle 3"/>
+          <p:cNvSpPr/>
           <p:nvPr/>
         </p:nvSpPr>
         <p:spPr>
           <a:xfrm>
-            <a:off x="960120" y="1600200"/>
-            <a:ext cx="3474720" cy="4480560"/>
-          </a:xfrm>
-          <a:prstGeom prst="rect">
-            <a:avLst/>
-          </a:prstGeom>
-          <a:noFill/>
-        </p:spPr>
-        <p:txBody>
-          <a:bodyPr wrap="square" lIns="0" tIns="0" rIns="0" bIns="0">
-            <a:spAutoFit/>
-          </a:bodyPr>
-          <a:lstStyle/>
-          <a:p>
-            <a:pPr>
-              <a:spcAft>
-                <a:spcPts val="1200"/>
-              </a:spcAft>
-              <a:defRPr sz="1600" b="1">
-                <a:solidFill>
-                  <a:srgbClr val="0F172A"/>
-                </a:solidFill>
-                <a:latin typeface="Arial"/>
-              </a:defRPr>
-            </a:pPr>
-            <a:r>
-              <a:t>PDF Import Features</a:t>
-            </a:r>
-          </a:p>
-          <a:p>
-            <a:pPr>
-              <a:spcAft>
-                <a:spcPts val="1000"/>
-              </a:spcAft>
-              <a:defRPr sz="1200">
-                <a:latin typeface="Arial"/>
-              </a:defRPr>
-            </a:pPr>
-            <a:r>
-              <a:rPr b="1">
-                <a:solidFill>
-                  <a:srgbClr val="0F172A"/>
-                </a:solidFill>
-              </a:rPr>
-              <a:t>✔  Multi-Format Parsing: </a:t>
-            </a:r>
-            <a:r>
-              <a:rPr>
-                <a:solidFill>
-                  <a:srgbClr val="64748B"/>
-                </a:solidFill>
-              </a:rPr>
-              <a:t>BC 2.0, BC 2.3, BC 2.7, BC 4.0, BC 2.6.1 &amp; BC 2.6.2.</a:t>
-            </a:r>
-          </a:p>
-          <a:p>
-            <a:pPr>
-              <a:spcAft>
-                <a:spcPts val="1000"/>
-              </a:spcAft>
-              <a:defRPr sz="1200">
-                <a:latin typeface="Arial"/>
-              </a:defRPr>
-            </a:pPr>
-            <a:r>
-              <a:rPr b="1">
-                <a:solidFill>
-                  <a:srgbClr val="0F172A"/>
-                </a:solidFill>
-              </a:rPr>
-              <a:t>✔  Zero Manual Entry: </a:t>
-            </a:r>
-            <a:r>
-              <a:rPr>
-                <a:solidFill>
-                  <a:srgbClr val="64748B"/>
-                </a:solidFill>
-              </a:rPr>
-              <a:t>Extracts items directly from vector PDF structure.</a:t>
-            </a:r>
-          </a:p>
-          <a:p>
-            <a:pPr>
-              <a:spcAft>
-                <a:spcPts val="1000"/>
-              </a:spcAft>
-              <a:defRPr sz="1200">
-                <a:latin typeface="Arial"/>
-              </a:defRPr>
-            </a:pPr>
-            <a:r>
-              <a:rPr b="1">
-                <a:solidFill>
-                  <a:srgbClr val="0F172A"/>
-                </a:solidFill>
-              </a:rPr>
-              <a:t>✔  3-Layer Classifier: </a:t>
-            </a:r>
-            <a:r>
-              <a:rPr>
-                <a:solidFill>
-                  <a:srgbClr val="64748B"/>
-                </a:solidFill>
-              </a:rPr>
-              <a:t>Matches HS Code, Keywords &amp; Custom DB Mappings.</a:t>
-            </a:r>
-          </a:p>
-          <a:p>
-            <a:pPr>
-              <a:spcAft>
-                <a:spcPts val="1000"/>
-              </a:spcAft>
-              <a:defRPr sz="1200">
-                <a:latin typeface="Arial"/>
-              </a:defRPr>
-            </a:pPr>
-            <a:r>
-              <a:rPr b="1">
-                <a:solidFill>
-                  <a:srgbClr val="0F172A"/>
-                </a:solidFill>
-              </a:rPr>
-              <a:t>✔  Automatic Kategori: </a:t>
-            </a:r>
-            <a:r>
-              <a:rPr>
-                <a:solidFill>
-                  <a:srgbClr val="64748B"/>
-                </a:solidFill>
-              </a:rPr>
-              <a:t>Fills INSW Category codes 1-8 with 0 manual clicks.</a:t>
-            </a:r>
-          </a:p>
-        </p:txBody>
-      </p:sp>
-      <p:sp>
-        <p:nvSpPr>
-          <p:cNvPr id="5" name="Rounded Rectangle 4"/>
-          <p:cNvSpPr/>
-          <p:nvPr/>
-        </p:nvSpPr>
-        <p:spPr>
-          <a:xfrm>
-            <a:off x="4846320" y="1371600"/>
-            <a:ext cx="6583680" cy="4937760"/>
+            <a:off x="6248095" y="1371600"/>
+            <a:ext cx="5120640" cy="4754880"/>
           </a:xfrm>
           <a:prstGeom prst="roundRect">
             <a:avLst/>
@@ -4248,7 +4171,7 @@
           <a:solidFill>
             <a:srgbClr val="FFFFFF"/>
           </a:solidFill>
-          <a:ln w="19050">
+          <a:ln>
             <a:solidFill>
               <a:srgbClr val="E2E8F0"/>
             </a:solidFill>
@@ -4269,37 +4192,101 @@
           </a:fontRef>
         </p:style>
         <p:txBody>
-          <a:bodyPr rtlCol="0" anchor="ctr"/>
-          <a:lstStyle/>
-          <a:p>
-            <a:pPr algn="ctr"/>
-          </a:p>
-        </p:txBody>
-      </p:sp>
-      <p:pic>
-        <p:nvPicPr>
-          <p:cNvPr id="6" name="Picture 5" descr="perfect_pemasukan.png"/>
-          <p:cNvPicPr>
-            <a:picLocks noChangeAspect="1"/>
-          </p:cNvPicPr>
-          <p:nvPr/>
-        </p:nvPicPr>
-        <p:blipFill>
-          <a:blip r:embed="rId2"/>
-          <a:stretch>
-            <a:fillRect/>
-          </a:stretch>
-        </p:blipFill>
-        <p:spPr>
-          <a:xfrm>
-            <a:off x="4919472" y="2216912"/>
-            <a:ext cx="6437376" cy="3247136"/>
-          </a:xfrm>
-          <a:prstGeom prst="rect">
-            <a:avLst/>
-          </a:prstGeom>
-        </p:spPr>
-      </p:pic>
+          <a:bodyPr rtlCol="0" anchor="ctr" wrap="square" tIns="274320" lIns="274320"/>
+          <a:lstStyle/>
+          <a:p>
+            <a:pPr algn="ctr">
+              <a:defRPr sz="1600" b="1">
+                <a:solidFill>
+                  <a:srgbClr val="10B981"/>
+                </a:solidFill>
+                <a:latin typeface="Segoe UI"/>
+              </a:defRPr>
+            </a:pPr>
+            <a:r>
+              <a:t>🇬🇧 5:00 AM Shift Cutoff Rationale</a:t>
+            </a:r>
+          </a:p>
+          <a:p>
+            <a:pPr>
+              <a:defRPr sz="1300">
+                <a:solidFill>
+                  <a:srgbClr val="0F172A"/>
+                </a:solidFill>
+                <a:latin typeface="Segoe UI"/>
+              </a:defRPr>
+            </a:pPr>
+            <a:r>
+              <a:t>Factory operations feature night shifts running past midnight.</a:t>
+            </a:r>
+          </a:p>
+          <a:p>
+            <a:pPr>
+              <a:defRPr sz="1300">
+                <a:solidFill>
+                  <a:srgbClr val="0F172A"/>
+                </a:solidFill>
+                <a:latin typeface="Segoe UI"/>
+              </a:defRPr>
+            </a:pPr>
+            <a:r>
+              <a:t>A 00:00 AM cutoff would fragment night shift output dates.</a:t>
+            </a:r>
+          </a:p>
+          <a:p>
+            <a:pPr>
+              <a:defRPr sz="1300">
+                <a:solidFill>
+                  <a:srgbClr val="0F172A"/>
+                </a:solidFill>
+                <a:latin typeface="Segoe UI"/>
+              </a:defRPr>
+            </a:pPr>
+            <a:r>
+              <a:t>Embedded 5:00 AM Cutoff Formula:</a:t>
+            </a:r>
+          </a:p>
+          <a:p>
+            <a:pPr>
+              <a:defRPr sz="1300">
+                <a:solidFill>
+                  <a:srgbClr val="0F172A"/>
+                </a:solidFill>
+                <a:latin typeface="Segoe UI"/>
+              </a:defRPr>
+            </a:pPr>
+            <a:r>
+              <a:t>   DATEADD(hour, -5, t.MODIFIEDDATETIME)</a:t>
+            </a:r>
+          </a:p>
+          <a:p>
+            <a:pPr>
+              <a:defRPr sz="1300">
+                <a:solidFill>
+                  <a:srgbClr val="0F172A"/>
+                </a:solidFill>
+                <a:latin typeface="Segoe UI"/>
+              </a:defRPr>
+            </a:pPr>
+            <a:r>
+              <a:t>Window: 05:00:00 AM Target Date -&gt; 05:00:00 AM Next Day.</a:t>
+            </a:r>
+          </a:p>
+          <a:p>
+            <a:pPr>
+              <a:defRPr sz="1300">
+                <a:solidFill>
+                  <a:srgbClr val="0F172A"/>
+                </a:solidFill>
+                <a:latin typeface="Segoe UI"/>
+              </a:defRPr>
+            </a:pPr>
+            <a:r>
+              <a:t>Guarantees 100% alignment between software &amp; physical stock.</a:t>
+            </a:r>
+          </a:p>
+        </p:txBody>
+      </p:sp>
     </p:spTree>
   </p:cSld>
   <p:clrMapOvr>
@@ -4335,7 +4322,7 @@
         <p:spPr>
           <a:xfrm>
             <a:off x="731520" y="365760"/>
-            <a:ext cx="10698480" cy="822960"/>
+            <a:ext cx="10728655" cy="822960"/>
           </a:xfrm>
           <a:prstGeom prst="rect">
             <a:avLst/>
@@ -4343,37 +4330,34 @@
           <a:noFill/>
         </p:spPr>
         <p:txBody>
-          <a:bodyPr wrap="square" lIns="0" tIns="0" rIns="0" bIns="0">
+          <a:bodyPr wrap="square" tIns="0" bIns="0">
             <a:spAutoFit/>
           </a:bodyPr>
           <a:lstStyle/>
           <a:p>
             <a:pPr>
-              <a:defRPr sz="2400" b="1">
-                <a:solidFill>
-                  <a:srgbClr val="0F172A"/>
-                </a:solidFill>
-                <a:latin typeface="Arial"/>
-              </a:defRPr>
-            </a:pPr>
-            <a:r>
-              <a:t>Stock Opname Management (kdKegiatan: 32)</a:t>
-            </a:r>
-          </a:p>
-          <a:p>
-            <a:pPr>
-              <a:spcBef>
-                <a:spcPts val="300"/>
-              </a:spcBef>
-              <a:defRPr sz="1300">
-                <a:solidFill>
-                  <a:srgbClr val="3BA55C"/>
-                </a:solidFill>
-                <a:latin typeface="Arial"/>
-              </a:defRPr>
-            </a:pPr>
-            <a:r>
-              <a:t>Live AXDB Stock Opname Journal Sync &amp; Physical Stock Count</a:t>
+              <a:defRPr sz="2200" b="1">
+                <a:solidFill>
+                  <a:srgbClr val="0F172A"/>
+                </a:solidFill>
+                <a:latin typeface="Segoe UI"/>
+              </a:defRPr>
+            </a:pPr>
+            <a:r>
+              <a:t>4. CƠ CHẾ PHÂN LOẠI &amp; KIỂM SOÁT RỦI RO CEISA 4.0</a:t>
+            </a:r>
+          </a:p>
+          <a:p>
+            <a:pPr>
+              <a:defRPr sz="1300" b="1">
+                <a:solidFill>
+                  <a:srgbClr val="10B981"/>
+                </a:solidFill>
+                <a:latin typeface="Segoe UI"/>
+              </a:defRPr>
+            </a:pPr>
+            <a:r>
+              <a:t>4. CEISA 4.0 CLASSIFICATION &amp; INSW RISK CONTROL ENGINE</a:t>
             </a:r>
           </a:p>
         </p:txBody>
@@ -4387,7 +4371,7 @@
         <p:spPr>
           <a:xfrm>
             <a:off x="731520" y="1371600"/>
-            <a:ext cx="3931920" cy="4937760"/>
+            <a:ext cx="5120640" cy="4754880"/>
           </a:xfrm>
           <a:prstGeom prst="roundRect">
             <a:avLst/>
@@ -4395,9 +4379,9 @@
           <a:solidFill>
             <a:srgbClr val="FFFFFF"/>
           </a:solidFill>
-          <a:ln w="12700">
+          <a:ln>
             <a:solidFill>
-              <a:srgbClr val="E2E8F0"/>
+              <a:srgbClr val="9333EA"/>
             </a:solidFill>
           </a:ln>
         </p:spPr>
@@ -4416,166 +4400,111 @@
           </a:fontRef>
         </p:style>
         <p:txBody>
-          <a:bodyPr rtlCol="0" anchor="ctr"/>
-          <a:lstStyle/>
-          <a:p>
-            <a:pPr algn="ctr"/>
-          </a:p>
-        </p:txBody>
-      </p:sp>
-      <p:sp>
-        <p:nvSpPr>
-          <p:cNvPr id="4" name="TextBox 3"/>
-          <p:cNvSpPr txBox="1"/>
+          <a:bodyPr rtlCol="0" anchor="ctr" wrap="square" tIns="274320" lIns="274320"/>
+          <a:lstStyle/>
+          <a:p>
+            <a:pPr algn="ctr">
+              <a:defRPr sz="1600" b="1">
+                <a:solidFill>
+                  <a:srgbClr val="9333EA"/>
+                </a:solidFill>
+                <a:latin typeface="Segoe UI"/>
+              </a:defRPr>
+            </a:pPr>
+            <a:r>
+              <a:t>🔒 Tờ khai CEISA 4.0 (Non-INSW)</a:t>
+            </a:r>
+          </a:p>
+          <a:p>
+            <a:pPr>
+              <a:defRPr sz="1300">
+                <a:solidFill>
+                  <a:srgbClr val="0F172A"/>
+                </a:solidFill>
+                <a:latin typeface="Segoe UI"/>
+              </a:defRPr>
+            </a:pPr>
+            <a:r>
+              <a:t>Loại chứng từ: BC 2.7, BC 4.1, BC 2.6.1, BC 2.5.</a:t>
+            </a:r>
+          </a:p>
+          <a:p>
+            <a:pPr>
+              <a:defRPr sz="1300">
+                <a:solidFill>
+                  <a:srgbClr val="0F172A"/>
+                </a:solidFill>
+                <a:latin typeface="Segoe UI"/>
+              </a:defRPr>
+            </a:pPr>
+            <a:r>
+              <a:t>Tự động nhận diện &amp; gắn nhãn: 🔒 CEISA (Non-INSW).</a:t>
+            </a:r>
+          </a:p>
+          <a:p>
+            <a:pPr>
+              <a:defRPr sz="1300">
+                <a:solidFill>
+                  <a:srgbClr val="0F172A"/>
+                </a:solidFill>
+                <a:latin typeface="Segoe UI"/>
+              </a:defRPr>
+            </a:pPr>
+            <a:r>
+              <a:t>Tự động KHÓA nút Push lên cổng INSW.</a:t>
+            </a:r>
+          </a:p>
+          <a:p>
+            <a:pPr>
+              <a:defRPr sz="1300">
+                <a:solidFill>
+                  <a:srgbClr val="0F172A"/>
+                </a:solidFill>
+                <a:latin typeface="Segoe UI"/>
+              </a:defRPr>
+            </a:pPr>
+            <a:r>
+              <a:t>Loại bỏ 100% rủi ro đẩy nhầm chứng từ CEISA lên INSW.</a:t>
+            </a:r>
+          </a:p>
+          <a:p>
+            <a:pPr>
+              <a:defRPr sz="1300">
+                <a:solidFill>
+                  <a:srgbClr val="0F172A"/>
+                </a:solidFill>
+                <a:latin typeface="Segoe UI"/>
+              </a:defRPr>
+            </a:pPr>
+            <a:r>
+              <a:t>Tránh bị Hải quan phạt vi phạm dữ liệu hoặc từ chối.</a:t>
+            </a:r>
+          </a:p>
+          <a:p>
+            <a:pPr>
+              <a:defRPr sz="1300">
+                <a:solidFill>
+                  <a:srgbClr val="0F172A"/>
+                </a:solidFill>
+                <a:latin typeface="Segoe UI"/>
+              </a:defRPr>
+            </a:pPr>
+            <a:r>
+              <a:t>Vẫn lưu trữ 100% trong kho IT Inventory phục vụ kiểm toán.</a:t>
+            </a:r>
+          </a:p>
+        </p:txBody>
+      </p:sp>
+      <p:sp>
+        <p:nvSpPr>
+          <p:cNvPr id="4" name="Rounded Rectangle 3"/>
+          <p:cNvSpPr/>
           <p:nvPr/>
         </p:nvSpPr>
         <p:spPr>
           <a:xfrm>
-            <a:off x="960120" y="1600200"/>
-            <a:ext cx="3474720" cy="4480560"/>
-          </a:xfrm>
-          <a:prstGeom prst="rect">
-            <a:avLst/>
-          </a:prstGeom>
-          <a:noFill/>
-        </p:spPr>
-        <p:txBody>
-          <a:bodyPr wrap="square" lIns="0" tIns="0" rIns="0" bIns="0">
-            <a:spAutoFit/>
-          </a:bodyPr>
-          <a:lstStyle/>
-          <a:p>
-            <a:pPr>
-              <a:spcAft>
-                <a:spcPts val="1200"/>
-              </a:spcAft>
-              <a:defRPr sz="1600" b="1">
-                <a:solidFill>
-                  <a:srgbClr val="0F172A"/>
-                </a:solidFill>
-                <a:latin typeface="Arial"/>
-              </a:defRPr>
-            </a:pPr>
-            <a:r>
-              <a:t>Stock Opname Features</a:t>
-            </a:r>
-          </a:p>
-          <a:p>
-            <a:pPr>
-              <a:spcAft>
-                <a:spcPts val="1000"/>
-              </a:spcAft>
-              <a:defRPr sz="1200">
-                <a:latin typeface="Arial"/>
-              </a:defRPr>
-            </a:pPr>
-            <a:r>
-              <a:rPr b="1">
-                <a:solidFill>
-                  <a:srgbClr val="0F172A"/>
-                </a:solidFill>
-              </a:rPr>
-              <a:t>✔  AXDB Journal Sync: </a:t>
-            </a:r>
-            <a:r>
-              <a:rPr>
-                <a:solidFill>
-                  <a:srgbClr val="64748B"/>
-                </a:solidFill>
-              </a:rPr>
-              <a:t>Direct physical stock count sync from ERP.</a:t>
-            </a:r>
-          </a:p>
-          <a:p>
-            <a:pPr>
-              <a:spcAft>
-                <a:spcPts val="1000"/>
-              </a:spcAft>
-              <a:defRPr sz="1200">
-                <a:latin typeface="Arial"/>
-              </a:defRPr>
-            </a:pPr>
-            <a:r>
-              <a:rPr b="1">
-                <a:solidFill>
-                  <a:srgbClr val="0F172A"/>
-                </a:solidFill>
-              </a:rPr>
-              <a:t>✔  System Balance Check: </a:t>
-            </a:r>
-            <a:r>
-              <a:rPr>
-                <a:solidFill>
-                  <a:srgbClr val="64748B"/>
-                </a:solidFill>
-              </a:rPr>
-              <a:t>Compares actual stock counts against system balance.</a:t>
-            </a:r>
-          </a:p>
-          <a:p>
-            <a:pPr>
-              <a:spcAft>
-                <a:spcPts val="1000"/>
-              </a:spcAft>
-              <a:defRPr sz="1200">
-                <a:latin typeface="Arial"/>
-              </a:defRPr>
-            </a:pPr>
-            <a:r>
-              <a:rPr b="1">
-                <a:solidFill>
-                  <a:srgbClr val="0F172A"/>
-                </a:solidFill>
-              </a:rPr>
-              <a:t>✔  5AM Cut-off Window: </a:t>
-            </a:r>
-            <a:r>
-              <a:rPr>
-                <a:solidFill>
-                  <a:srgbClr val="64748B"/>
-                </a:solidFill>
-              </a:rPr>
-              <a:t>DATEADD(hour, -5, t.MODIFIEDDATETIME) SQL logic.</a:t>
-            </a:r>
-          </a:p>
-          <a:p>
-            <a:pPr>
-              <a:spcAft>
-                <a:spcPts val="1000"/>
-              </a:spcAft>
-              <a:defRPr sz="1200">
-                <a:latin typeface="Arial"/>
-              </a:defRPr>
-            </a:pPr>
-            <a:r>
-              <a:rPr b="1">
-                <a:solidFill>
-                  <a:srgbClr val="0F172A"/>
-                </a:solidFill>
-              </a:rPr>
-              <a:t>✔  Batch Push: </a:t>
-            </a:r>
-            <a:r>
-              <a:rPr>
-                <a:solidFill>
-                  <a:srgbClr val="64748B"/>
-                </a:solidFill>
-              </a:rPr>
-              <a:t>Direct single-click push to INSW API gateway.</a:t>
-            </a:r>
-          </a:p>
-        </p:txBody>
-      </p:sp>
-      <p:sp>
-        <p:nvSpPr>
-          <p:cNvPr id="5" name="Rounded Rectangle 4"/>
-          <p:cNvSpPr/>
-          <p:nvPr/>
-        </p:nvSpPr>
-        <p:spPr>
-          <a:xfrm>
-            <a:off x="4846320" y="1371600"/>
-            <a:ext cx="6583680" cy="4937760"/>
+            <a:off x="6248095" y="1371600"/>
+            <a:ext cx="5120640" cy="4754880"/>
           </a:xfrm>
           <a:prstGeom prst="roundRect">
             <a:avLst/>
@@ -4583,9 +4512,9 @@
           <a:solidFill>
             <a:srgbClr val="FFFFFF"/>
           </a:solidFill>
-          <a:ln w="19050">
+          <a:ln>
             <a:solidFill>
-              <a:srgbClr val="E2E8F0"/>
+              <a:srgbClr val="10B981"/>
             </a:solidFill>
           </a:ln>
         </p:spPr>
@@ -4604,37 +4533,101 @@
           </a:fontRef>
         </p:style>
         <p:txBody>
-          <a:bodyPr rtlCol="0" anchor="ctr"/>
-          <a:lstStyle/>
-          <a:p>
-            <a:pPr algn="ctr"/>
-          </a:p>
-        </p:txBody>
-      </p:sp>
-      <p:pic>
-        <p:nvPicPr>
-          <p:cNvPr id="6" name="Picture 5" descr="perfect_dashboard.png"/>
-          <p:cNvPicPr>
-            <a:picLocks noChangeAspect="1"/>
-          </p:cNvPicPr>
-          <p:nvPr/>
-        </p:nvPicPr>
-        <p:blipFill>
-          <a:blip r:embed="rId2"/>
-          <a:stretch>
-            <a:fillRect/>
-          </a:stretch>
-        </p:blipFill>
-        <p:spPr>
-          <a:xfrm>
-            <a:off x="4919472" y="2216912"/>
-            <a:ext cx="6437376" cy="3247136"/>
-          </a:xfrm>
-          <a:prstGeom prst="rect">
-            <a:avLst/>
-          </a:prstGeom>
-        </p:spPr>
-      </p:pic>
+          <a:bodyPr rtlCol="0" anchor="ctr" wrap="square" tIns="274320" lIns="274320"/>
+          <a:lstStyle/>
+          <a:p>
+            <a:pPr algn="ctr">
+              <a:defRPr sz="1600" b="1">
+                <a:solidFill>
+                  <a:srgbClr val="10B981"/>
+                </a:solidFill>
+                <a:latin typeface="Segoe UI"/>
+              </a:defRPr>
+            </a:pPr>
+            <a:r>
+              <a:t>🌐 Customs INSW Pushable Declarations</a:t>
+            </a:r>
+          </a:p>
+          <a:p>
+            <a:pPr>
+              <a:defRPr sz="1300">
+                <a:solidFill>
+                  <a:srgbClr val="0F172A"/>
+                </a:solidFill>
+                <a:latin typeface="Segoe UI"/>
+              </a:defRPr>
+            </a:pPr>
+            <a:r>
+              <a:t>Applies to official INSW Customs Declaration Types.</a:t>
+            </a:r>
+          </a:p>
+          <a:p>
+            <a:pPr>
+              <a:defRPr sz="1300">
+                <a:solidFill>
+                  <a:srgbClr val="0F172A"/>
+                </a:solidFill>
+                <a:latin typeface="Segoe UI"/>
+              </a:defRPr>
+            </a:pPr>
+            <a:r>
+              <a:t>Supports Batch Push &amp; Individual Document Transmission.</a:t>
+            </a:r>
+          </a:p>
+          <a:p>
+            <a:pPr>
+              <a:defRPr sz="1300">
+                <a:solidFill>
+                  <a:srgbClr val="0F172A"/>
+                </a:solidFill>
+                <a:latin typeface="Segoe UI"/>
+              </a:defRPr>
+            </a:pPr>
+            <a:r>
+              <a:t>Captures real-time Portal Response Code (HTTP 200 Success).</a:t>
+            </a:r>
+          </a:p>
+          <a:p>
+            <a:pPr>
+              <a:defRPr sz="1300">
+                <a:solidFill>
+                  <a:srgbClr val="0F172A"/>
+                </a:solidFill>
+                <a:latin typeface="Segoe UI"/>
+              </a:defRPr>
+            </a:pPr>
+            <a:r>
+              <a:t>Stores XML/JSON Payload for complete audit readiness.</a:t>
+            </a:r>
+          </a:p>
+          <a:p>
+            <a:pPr>
+              <a:defRPr sz="1300">
+                <a:solidFill>
+                  <a:srgbClr val="0F172A"/>
+                </a:solidFill>
+                <a:latin typeface="Segoe UI"/>
+              </a:defRPr>
+            </a:pPr>
+            <a:r>
+              <a:t>Ensures total transparency for Customs Inspections.</a:t>
+            </a:r>
+          </a:p>
+          <a:p>
+            <a:pPr>
+              <a:defRPr sz="1300">
+                <a:solidFill>
+                  <a:srgbClr val="0F172A"/>
+                </a:solidFill>
+                <a:latin typeface="Segoe UI"/>
+              </a:defRPr>
+            </a:pPr>
+            <a:r>
+              <a:t>Zero data mismatch risk across customs portals.</a:t>
+            </a:r>
+          </a:p>
+        </p:txBody>
+      </p:sp>
     </p:spTree>
   </p:cSld>
   <p:clrMapOvr>
@@ -4670,7 +4663,7 @@
         <p:spPr>
           <a:xfrm>
             <a:off x="731520" y="365760"/>
-            <a:ext cx="10698480" cy="822960"/>
+            <a:ext cx="10728655" cy="822960"/>
           </a:xfrm>
           <a:prstGeom prst="rect">
             <a:avLst/>
@@ -4678,37 +4671,34 @@
           <a:noFill/>
         </p:spPr>
         <p:txBody>
-          <a:bodyPr wrap="square" lIns="0" tIns="0" rIns="0" bIns="0">
+          <a:bodyPr wrap="square" tIns="0" bIns="0">
             <a:spAutoFit/>
           </a:bodyPr>
           <a:lstStyle/>
           <a:p>
             <a:pPr>
-              <a:defRPr sz="2400" b="1">
-                <a:solidFill>
-                  <a:srgbClr val="0F172A"/>
-                </a:solidFill>
-                <a:latin typeface="Arial"/>
-              </a:defRPr>
-            </a:pPr>
-            <a:r>
-              <a:t>Inventory Adjustment (kdKegiatan: 33)</a:t>
-            </a:r>
-          </a:p>
-          <a:p>
-            <a:pPr>
-              <a:spcBef>
-                <a:spcPts val="300"/>
-              </a:spcBef>
-              <a:defRPr sz="1300">
-                <a:solidFill>
-                  <a:srgbClr val="3BA55C"/>
-                </a:solidFill>
-                <a:latin typeface="Arial"/>
-              </a:defRPr>
-            </a:pPr>
-            <a:r>
-              <a:t>Live AXDB Movement Journal Synchronization for Stock Gain &amp; Loss</a:t>
+              <a:defRPr sz="2200" b="1">
+                <a:solidFill>
+                  <a:srgbClr val="0F172A"/>
+                </a:solidFill>
+                <a:latin typeface="Segoe UI"/>
+              </a:defRPr>
+            </a:pPr>
+            <a:r>
+              <a:t>5. NHẬT KÝ KIỂM TOÁN TẬP TRUNG &amp; TRUY XUẤT NGUỒN GỐC</a:t>
+            </a:r>
+          </a:p>
+          <a:p>
+            <a:pPr>
+              <a:defRPr sz="1300" b="1">
+                <a:solidFill>
+                  <a:srgbClr val="10B981"/>
+                </a:solidFill>
+                <a:latin typeface="Segoe UI"/>
+              </a:defRPr>
+            </a:pPr>
+            <a:r>
+              <a:t>5. IMMUTABLE AUDIT TRAIL &amp; REAL-TIME TRACEABILITY</a:t>
             </a:r>
           </a:p>
         </p:txBody>
@@ -4722,7 +4712,7 @@
         <p:spPr>
           <a:xfrm>
             <a:off x="731520" y="1371600"/>
-            <a:ext cx="3931920" cy="4937760"/>
+            <a:ext cx="5120640" cy="4754880"/>
           </a:xfrm>
           <a:prstGeom prst="roundRect">
             <a:avLst/>
@@ -4730,7 +4720,7 @@
           <a:solidFill>
             <a:srgbClr val="FFFFFF"/>
           </a:solidFill>
-          <a:ln w="12700">
+          <a:ln>
             <a:solidFill>
               <a:srgbClr val="E2E8F0"/>
             </a:solidFill>
@@ -4751,166 +4741,111 @@
           </a:fontRef>
         </p:style>
         <p:txBody>
-          <a:bodyPr rtlCol="0" anchor="ctr"/>
-          <a:lstStyle/>
-          <a:p>
-            <a:pPr algn="ctr"/>
-          </a:p>
-        </p:txBody>
-      </p:sp>
-      <p:sp>
-        <p:nvSpPr>
-          <p:cNvPr id="4" name="TextBox 3"/>
-          <p:cNvSpPr txBox="1"/>
+          <a:bodyPr rtlCol="0" anchor="ctr" wrap="square" tIns="274320" lIns="274320"/>
+          <a:lstStyle/>
+          <a:p>
+            <a:pPr algn="ctr">
+              <a:defRPr sz="1600" b="1">
+                <a:solidFill>
+                  <a:srgbClr val="0F172A"/>
+                </a:solidFill>
+                <a:latin typeface="Segoe UI"/>
+              </a:defRPr>
+            </a:pPr>
+            <a:r>
+              <a:t>🇻🇳 Nhật ký Kiểm toán Không thể Sửa đổi</a:t>
+            </a:r>
+          </a:p>
+          <a:p>
+            <a:pPr>
+              <a:defRPr sz="1300">
+                <a:solidFill>
+                  <a:srgbClr val="0F172A"/>
+                </a:solidFill>
+                <a:latin typeface="Segoe UI"/>
+              </a:defRPr>
+            </a:pPr>
+            <a:r>
+              <a:t>Lưu vết 100% thao tác trong bảng INSW_PushLog &amp; INSW_ImportedFiles.</a:t>
+            </a:r>
+          </a:p>
+          <a:p>
+            <a:pPr>
+              <a:defRPr sz="1300">
+                <a:solidFill>
+                  <a:srgbClr val="0F172A"/>
+                </a:solidFill>
+                <a:latin typeface="Segoe UI"/>
+              </a:defRPr>
+            </a:pPr>
+            <a:r>
+              <a:t>Ghi nhận chính xác: Ngày giờ, Người thực hiện, IP kết nối.</a:t>
+            </a:r>
+          </a:p>
+          <a:p>
+            <a:pPr>
+              <a:defRPr sz="1300">
+                <a:solidFill>
+                  <a:srgbClr val="0F172A"/>
+                </a:solidFill>
+                <a:latin typeface="Segoe UI"/>
+              </a:defRPr>
+            </a:pPr>
+            <a:r>
+              <a:t>Lưu giữ mã phản hồi Hải quan (HTTP Status Code).</a:t>
+            </a:r>
+          </a:p>
+          <a:p>
+            <a:pPr>
+              <a:defRPr sz="1300">
+                <a:solidFill>
+                  <a:srgbClr val="0F172A"/>
+                </a:solidFill>
+                <a:latin typeface="Segoe UI"/>
+              </a:defRPr>
+            </a:pPr>
+            <a:r>
+              <a:t>Lưu giữ toàn bộ chuỗi Request &amp; Response XML/JSON.</a:t>
+            </a:r>
+          </a:p>
+          <a:p>
+            <a:pPr>
+              <a:defRPr sz="1300">
+                <a:solidFill>
+                  <a:srgbClr val="0F172A"/>
+                </a:solidFill>
+                <a:latin typeface="Segoe UI"/>
+              </a:defRPr>
+            </a:pPr>
+            <a:r>
+              <a:t>Sẵn sàng giải trình khi Hải quan kiểm tra đột xuất.</a:t>
+            </a:r>
+          </a:p>
+          <a:p>
+            <a:pPr>
+              <a:defRPr sz="1300">
+                <a:solidFill>
+                  <a:srgbClr val="0F172A"/>
+                </a:solidFill>
+                <a:latin typeface="Segoe UI"/>
+              </a:defRPr>
+            </a:pPr>
+            <a:r>
+              <a:t>Đáp ứng hoàn hảo kỳ báo cáo quyết toán Hải quan.</a:t>
+            </a:r>
+          </a:p>
+        </p:txBody>
+      </p:sp>
+      <p:sp>
+        <p:nvSpPr>
+          <p:cNvPr id="4" name="Rounded Rectangle 3"/>
+          <p:cNvSpPr/>
           <p:nvPr/>
         </p:nvSpPr>
         <p:spPr>
           <a:xfrm>
-            <a:off x="960120" y="1600200"/>
-            <a:ext cx="3474720" cy="4480560"/>
-          </a:xfrm>
-          <a:prstGeom prst="rect">
-            <a:avLst/>
-          </a:prstGeom>
-          <a:noFill/>
-        </p:spPr>
-        <p:txBody>
-          <a:bodyPr wrap="square" lIns="0" tIns="0" rIns="0" bIns="0">
-            <a:spAutoFit/>
-          </a:bodyPr>
-          <a:lstStyle/>
-          <a:p>
-            <a:pPr>
-              <a:spcAft>
-                <a:spcPts val="1200"/>
-              </a:spcAft>
-              <a:defRPr sz="1600" b="1">
-                <a:solidFill>
-                  <a:srgbClr val="0F172A"/>
-                </a:solidFill>
-                <a:latin typeface="Arial"/>
-              </a:defRPr>
-            </a:pPr>
-            <a:r>
-              <a:t>Adjustment Features</a:t>
-            </a:r>
-          </a:p>
-          <a:p>
-            <a:pPr>
-              <a:spcAft>
-                <a:spcPts val="1000"/>
-              </a:spcAft>
-              <a:defRPr sz="1200">
-                <a:latin typeface="Arial"/>
-              </a:defRPr>
-            </a:pPr>
-            <a:r>
-              <a:rPr b="1">
-                <a:solidFill>
-                  <a:srgbClr val="0F172A"/>
-                </a:solidFill>
-              </a:rPr>
-              <a:t>✔  Movement Journal Sync: </a:t>
-            </a:r>
-            <a:r>
-              <a:rPr>
-                <a:solidFill>
-                  <a:srgbClr val="64748B"/>
-                </a:solidFill>
-              </a:rPr>
-              <a:t>Syncs adjustment entries from AXDB Movement Journal.</a:t>
-            </a:r>
-          </a:p>
-          <a:p>
-            <a:pPr>
-              <a:spcAft>
-                <a:spcPts val="1000"/>
-              </a:spcAft>
-              <a:defRPr sz="1200">
-                <a:latin typeface="Arial"/>
-              </a:defRPr>
-            </a:pPr>
-            <a:r>
-              <a:rPr b="1">
-                <a:solidFill>
-                  <a:srgbClr val="0F172A"/>
-                </a:solidFill>
-              </a:rPr>
-              <a:t>✔  Stock Gain &amp; Loss: </a:t>
-            </a:r>
-            <a:r>
-              <a:rPr>
-                <a:solidFill>
-                  <a:srgbClr val="64748B"/>
-                </a:solidFill>
-              </a:rPr>
-              <a:t>Handles positive gains and negative losses/scrap correctly.</a:t>
-            </a:r>
-          </a:p>
-          <a:p>
-            <a:pPr>
-              <a:spcAft>
-                <a:spcPts val="1000"/>
-              </a:spcAft>
-              <a:defRPr sz="1200">
-                <a:latin typeface="Arial"/>
-              </a:defRPr>
-            </a:pPr>
-            <a:r>
-              <a:rPr b="1">
-                <a:solidFill>
-                  <a:srgbClr val="0F172A"/>
-                </a:solidFill>
-              </a:rPr>
-              <a:t>✔  Audit Reference: </a:t>
-            </a:r>
-            <a:r>
-              <a:rPr>
-                <a:solidFill>
-                  <a:srgbClr val="64748B"/>
-                </a:solidFill>
-              </a:rPr>
-              <a:t>Tracks adjustment document numbers &amp; timestamps.</a:t>
-            </a:r>
-          </a:p>
-          <a:p>
-            <a:pPr>
-              <a:spcAft>
-                <a:spcPts val="1000"/>
-              </a:spcAft>
-              <a:defRPr sz="1200">
-                <a:latin typeface="Arial"/>
-              </a:defRPr>
-            </a:pPr>
-            <a:r>
-              <a:rPr b="1">
-                <a:solidFill>
-                  <a:srgbClr val="0F172A"/>
-                </a:solidFill>
-              </a:rPr>
-              <a:t>✔  INSW Transmission: </a:t>
-            </a:r>
-            <a:r>
-              <a:rPr>
-                <a:solidFill>
-                  <a:srgbClr val="64748B"/>
-                </a:solidFill>
-              </a:rPr>
-              <a:t>Sends verified adjustment records directly to gateway.</a:t>
-            </a:r>
-          </a:p>
-        </p:txBody>
-      </p:sp>
-      <p:sp>
-        <p:nvSpPr>
-          <p:cNvPr id="5" name="Rounded Rectangle 4"/>
-          <p:cNvSpPr/>
-          <p:nvPr/>
-        </p:nvSpPr>
-        <p:spPr>
-          <a:xfrm>
-            <a:off x="4846320" y="1371600"/>
-            <a:ext cx="6583680" cy="4937760"/>
+            <a:off x="6248095" y="1371600"/>
+            <a:ext cx="5120640" cy="4754880"/>
           </a:xfrm>
           <a:prstGeom prst="roundRect">
             <a:avLst/>
@@ -4918,7 +4853,7 @@
           <a:solidFill>
             <a:srgbClr val="FFFFFF"/>
           </a:solidFill>
-          <a:ln w="19050">
+          <a:ln>
             <a:solidFill>
               <a:srgbClr val="E2E8F0"/>
             </a:solidFill>
@@ -4939,37 +4874,101 @@
           </a:fontRef>
         </p:style>
         <p:txBody>
-          <a:bodyPr rtlCol="0" anchor="ctr"/>
-          <a:lstStyle/>
-          <a:p>
-            <a:pPr algn="ctr"/>
-          </a:p>
-        </p:txBody>
-      </p:sp>
-      <p:pic>
-        <p:nvPicPr>
-          <p:cNvPr id="6" name="Picture 5" descr="perfect_adjustment.png"/>
-          <p:cNvPicPr>
-            <a:picLocks noChangeAspect="1"/>
-          </p:cNvPicPr>
-          <p:nvPr/>
-        </p:nvPicPr>
-        <p:blipFill>
-          <a:blip r:embed="rId2"/>
-          <a:stretch>
-            <a:fillRect/>
-          </a:stretch>
-        </p:blipFill>
-        <p:spPr>
-          <a:xfrm>
-            <a:off x="4919472" y="2216912"/>
-            <a:ext cx="6437376" cy="3247136"/>
-          </a:xfrm>
-          <a:prstGeom prst="rect">
-            <a:avLst/>
-          </a:prstGeom>
-        </p:spPr>
-      </p:pic>
+          <a:bodyPr rtlCol="0" anchor="ctr" wrap="square" tIns="274320" lIns="274320"/>
+          <a:lstStyle/>
+          <a:p>
+            <a:pPr algn="ctr">
+              <a:defRPr sz="1600" b="1">
+                <a:solidFill>
+                  <a:srgbClr val="10B981"/>
+                </a:solidFill>
+                <a:latin typeface="Segoe UI"/>
+              </a:defRPr>
+            </a:pPr>
+            <a:r>
+              <a:t>🇬🇧 Immutable Centralized Audit Log</a:t>
+            </a:r>
+          </a:p>
+          <a:p>
+            <a:pPr>
+              <a:defRPr sz="1300">
+                <a:solidFill>
+                  <a:srgbClr val="0F172A"/>
+                </a:solidFill>
+                <a:latin typeface="Segoe UI"/>
+              </a:defRPr>
+            </a:pPr>
+            <a:r>
+              <a:t>100% audit logging in INSW_PushLog &amp; INSW_ImportedFiles.</a:t>
+            </a:r>
+          </a:p>
+          <a:p>
+            <a:pPr>
+              <a:defRPr sz="1300">
+                <a:solidFill>
+                  <a:srgbClr val="0F172A"/>
+                </a:solidFill>
+                <a:latin typeface="Segoe UI"/>
+              </a:defRPr>
+            </a:pPr>
+            <a:r>
+              <a:t>Captures Timestamp, User Account, Connection IP.</a:t>
+            </a:r>
+          </a:p>
+          <a:p>
+            <a:pPr>
+              <a:defRPr sz="1300">
+                <a:solidFill>
+                  <a:srgbClr val="0F172A"/>
+                </a:solidFill>
+                <a:latin typeface="Segoe UI"/>
+              </a:defRPr>
+            </a:pPr>
+            <a:r>
+              <a:t>Logs exact Customs Gateway Response (HTTP Status).</a:t>
+            </a:r>
+          </a:p>
+          <a:p>
+            <a:pPr>
+              <a:defRPr sz="1300">
+                <a:solidFill>
+                  <a:srgbClr val="0F172A"/>
+                </a:solidFill>
+                <a:latin typeface="Segoe UI"/>
+              </a:defRPr>
+            </a:pPr>
+            <a:r>
+              <a:t>Stores complete Request &amp; Response XML/JSON payloads.</a:t>
+            </a:r>
+          </a:p>
+          <a:p>
+            <a:pPr>
+              <a:defRPr sz="1300">
+                <a:solidFill>
+                  <a:srgbClr val="0F172A"/>
+                </a:solidFill>
+                <a:latin typeface="Segoe UI"/>
+              </a:defRPr>
+            </a:pPr>
+            <a:r>
+              <a:t>Instantly ready for unannounced Customs inspections.</a:t>
+            </a:r>
+          </a:p>
+          <a:p>
+            <a:pPr>
+              <a:defRPr sz="1300">
+                <a:solidFill>
+                  <a:srgbClr val="0F172A"/>
+                </a:solidFill>
+                <a:latin typeface="Segoe UI"/>
+              </a:defRPr>
+            </a:pPr>
+            <a:r>
+              <a:t>Fully aligns with annual Customs Liquidation Audits.</a:t>
+            </a:r>
+          </a:p>
+        </p:txBody>
+      </p:sp>
     </p:spTree>
   </p:cSld>
   <p:clrMapOvr>
@@ -4984,7 +4983,7 @@
     <p:bg>
       <p:bgPr>
         <a:solidFill>
-          <a:srgbClr val="F8FAFC"/>
+          <a:srgbClr val="0F172A"/>
         </a:solidFill>
         <a:effectLst/>
       </p:bgPr>
@@ -4998,76 +4997,24 @@
       <p:grpSpPr/>
       <p:sp>
         <p:nvSpPr>
-          <p:cNvPr id="2" name="TextBox 1"/>
-          <p:cNvSpPr txBox="1"/>
+          <p:cNvPr id="2" name="Rounded Rectangle 1"/>
+          <p:cNvSpPr/>
           <p:nvPr/>
         </p:nvSpPr>
         <p:spPr>
           <a:xfrm>
-            <a:off x="731520" y="365760"/>
-            <a:ext cx="10698480" cy="822960"/>
-          </a:xfrm>
-          <a:prstGeom prst="rect">
-            <a:avLst/>
-          </a:prstGeom>
-          <a:noFill/>
-        </p:spPr>
-        <p:txBody>
-          <a:bodyPr wrap="square" lIns="0" tIns="0" rIns="0" bIns="0">
-            <a:spAutoFit/>
-          </a:bodyPr>
-          <a:lstStyle/>
-          <a:p>
-            <a:pPr>
-              <a:defRPr sz="2400" b="1">
-                <a:solidFill>
-                  <a:srgbClr val="0F172A"/>
-                </a:solidFill>
-                <a:latin typeface="Arial"/>
-              </a:defRPr>
-            </a:pPr>
-            <a:r>
-              <a:t>Audit Trail &amp; Push History (INSW_PushLog)</a:t>
-            </a:r>
-          </a:p>
-          <a:p>
-            <a:pPr>
-              <a:spcBef>
-                <a:spcPts val="300"/>
-              </a:spcBef>
-              <a:defRPr sz="1300">
-                <a:solidFill>
-                  <a:srgbClr val="3BA55C"/>
-                </a:solidFill>
-                <a:latin typeface="Arial"/>
-              </a:defRPr>
-            </a:pPr>
-            <a:r>
-              <a:t>Live Historical Push History &amp; Transmission Audit Log</a:t>
-            </a:r>
-          </a:p>
-        </p:txBody>
-      </p:sp>
-      <p:sp>
-        <p:nvSpPr>
-          <p:cNvPr id="3" name="Rounded Rectangle 2"/>
-          <p:cNvSpPr/>
-          <p:nvPr/>
-        </p:nvSpPr>
-        <p:spPr>
-          <a:xfrm>
-            <a:off x="731520" y="1371600"/>
-            <a:ext cx="3931920" cy="4937760"/>
+            <a:off x="1371600" y="1097280"/>
+            <a:ext cx="9448495" cy="4663440"/>
           </a:xfrm>
           <a:prstGeom prst="roundRect">
             <a:avLst/>
           </a:prstGeom>
           <a:solidFill>
-            <a:srgbClr val="FFFFFF"/>
+            <a:srgbClr val="1E293B"/>
           </a:solidFill>
-          <a:ln w="12700">
+          <a:ln>
             <a:solidFill>
-              <a:srgbClr val="E2E8F0"/>
+              <a:srgbClr val="10B981"/>
             </a:solidFill>
           </a:ln>
         </p:spPr>
@@ -5086,422 +5033,87 @@
           </a:fontRef>
         </p:style>
         <p:txBody>
-          <a:bodyPr rtlCol="0" anchor="ctr"/>
-          <a:lstStyle/>
-          <a:p>
-            <a:pPr algn="ctr"/>
-          </a:p>
-        </p:txBody>
-      </p:sp>
-      <p:sp>
-        <p:nvSpPr>
-          <p:cNvPr id="4" name="TextBox 3"/>
-          <p:cNvSpPr txBox="1"/>
-          <p:nvPr/>
-        </p:nvSpPr>
-        <p:spPr>
-          <a:xfrm>
-            <a:off x="960120" y="1600200"/>
-            <a:ext cx="3474720" cy="4480560"/>
-          </a:xfrm>
-          <a:prstGeom prst="rect">
-            <a:avLst/>
-          </a:prstGeom>
-          <a:noFill/>
-        </p:spPr>
-        <p:txBody>
-          <a:bodyPr wrap="square" lIns="0" tIns="0" rIns="0" bIns="0">
-            <a:spAutoFit/>
-          </a:bodyPr>
-          <a:lstStyle/>
+          <a:bodyPr rtlCol="0" anchor="ctr" wrap="square" tIns="457200" lIns="457200"/>
+          <a:lstStyle/>
+          <a:p>
+            <a:pPr algn="ctr">
+              <a:defRPr sz="2400" b="1">
+                <a:solidFill>
+                  <a:srgbClr val="10B981"/>
+                </a:solidFill>
+                <a:latin typeface="Segoe UI"/>
+              </a:defRPr>
+            </a:pPr>
+            <a:r>
+              <a:t>🚀 DEMO TRA CỨU TRỰC TIẾP &amp; THẢO LUẬN</a:t>
+            </a:r>
+          </a:p>
           <a:p>
             <a:pPr>
               <a:spcAft>
-                <a:spcPts val="1200"/>
+                <a:spcPts val="2000"/>
               </a:spcAft>
-              <a:defRPr sz="1600" b="1">
-                <a:solidFill>
-                  <a:srgbClr val="0F172A"/>
-                </a:solidFill>
-                <a:latin typeface="Arial"/>
-              </a:defRPr>
-            </a:pPr>
-            <a:r>
-              <a:t>Push History System</a:t>
-            </a:r>
-          </a:p>
-          <a:p>
-            <a:pPr>
-              <a:spcAft>
-                <a:spcPts val="1000"/>
-              </a:spcAft>
-              <a:defRPr sz="1200">
-                <a:latin typeface="Arial"/>
-              </a:defRPr>
-            </a:pPr>
-            <a:r>
-              <a:rPr b="1">
-                <a:solidFill>
-                  <a:srgbClr val="0F172A"/>
-                </a:solidFill>
-              </a:rPr>
-              <a:t>✔  Push Log Database: </a:t>
-            </a:r>
-            <a:r>
-              <a:rPr>
-                <a:solidFill>
-                  <a:srgbClr val="64748B"/>
-                </a:solidFill>
-              </a:rPr>
-              <a:t>Stores fileId, username, status, httpStatus &amp; duration.</a:t>
-            </a:r>
-          </a:p>
-          <a:p>
-            <a:pPr>
-              <a:spcAft>
-                <a:spcPts val="1000"/>
-              </a:spcAft>
-              <a:defRPr sz="1200">
-                <a:latin typeface="Arial"/>
-              </a:defRPr>
-            </a:pPr>
-            <a:r>
-              <a:rPr b="1">
-                <a:solidFill>
-                  <a:srgbClr val="0F172A"/>
-                </a:solidFill>
-              </a:rPr>
-              <a:t>✔  Full Payload Retention: </a:t>
-            </a:r>
-            <a:r>
-              <a:rPr>
-                <a:solidFill>
-                  <a:srgbClr val="64748B"/>
-                </a:solidFill>
-              </a:rPr>
-              <a:t>Saves both Request &amp; Response bodies for inspection.</a:t>
-            </a:r>
-          </a:p>
-          <a:p>
-            <a:pPr>
-              <a:spcAft>
-                <a:spcPts val="1000"/>
-              </a:spcAft>
-              <a:defRPr sz="1200">
-                <a:latin typeface="Arial"/>
-              </a:defRPr>
-            </a:pPr>
-            <a:r>
-              <a:rPr b="1">
-                <a:solidFill>
-                  <a:srgbClr val="0F172A"/>
-                </a:solidFill>
-              </a:rPr>
-              <a:t>✔  HTTP 200 Verification: </a:t>
-            </a:r>
-            <a:r>
-              <a:rPr>
-                <a:solidFill>
-                  <a:srgbClr val="64748B"/>
-                </a:solidFill>
-              </a:rPr>
-              <a:t>Captures official INSW success response codes.</a:t>
-            </a:r>
-          </a:p>
-          <a:p>
-            <a:pPr>
-              <a:spcAft>
-                <a:spcPts val="1000"/>
-              </a:spcAft>
-              <a:defRPr sz="1200">
-                <a:latin typeface="Arial"/>
-              </a:defRPr>
-            </a:pPr>
-            <a:r>
-              <a:rPr b="1">
-                <a:solidFill>
-                  <a:srgbClr val="0F172A"/>
-                </a:solidFill>
-              </a:rPr>
-              <a:t>✔  Duplicate Safeguard: </a:t>
-            </a:r>
-            <a:r>
-              <a:rPr>
-                <a:solidFill>
-                  <a:srgbClr val="64748B"/>
-                </a:solidFill>
-              </a:rPr>
-              <a:t>Prevents accidental re-transmission of sent files.</a:t>
-            </a:r>
-          </a:p>
-        </p:txBody>
-      </p:sp>
-      <p:sp>
-        <p:nvSpPr>
-          <p:cNvPr id="5" name="Rounded Rectangle 4"/>
-          <p:cNvSpPr/>
-          <p:nvPr/>
-        </p:nvSpPr>
-        <p:spPr>
-          <a:xfrm>
-            <a:off x="4846320" y="1371600"/>
-            <a:ext cx="6583680" cy="4937760"/>
-          </a:xfrm>
-          <a:prstGeom prst="roundRect">
-            <a:avLst/>
-          </a:prstGeom>
-          <a:solidFill>
-            <a:srgbClr val="FFFFFF"/>
-          </a:solidFill>
-          <a:ln w="19050">
-            <a:solidFill>
-              <a:srgbClr val="E2E8F0"/>
-            </a:solidFill>
-          </a:ln>
-        </p:spPr>
-        <p:style>
-          <a:lnRef idx="1">
-            <a:schemeClr val="accent1"/>
-          </a:lnRef>
-          <a:fillRef idx="3">
-            <a:schemeClr val="accent1"/>
-          </a:fillRef>
-          <a:effectRef idx="2">
-            <a:schemeClr val="accent1"/>
-          </a:effectRef>
-          <a:fontRef idx="minor">
-            <a:schemeClr val="lt1"/>
-          </a:fontRef>
-        </p:style>
-        <p:txBody>
-          <a:bodyPr rtlCol="0" anchor="ctr"/>
-          <a:lstStyle/>
-          <a:p>
-            <a:pPr algn="ctr"/>
-          </a:p>
-        </p:txBody>
-      </p:sp>
-      <p:pic>
-        <p:nvPicPr>
-          <p:cNvPr id="6" name="Picture 5" descr="perfect_insw_push.png"/>
-          <p:cNvPicPr>
-            <a:picLocks noChangeAspect="1"/>
-          </p:cNvPicPr>
-          <p:nvPr/>
-        </p:nvPicPr>
-        <p:blipFill>
-          <a:blip r:embed="rId2"/>
-          <a:stretch>
-            <a:fillRect/>
-          </a:stretch>
-        </p:blipFill>
-        <p:spPr>
-          <a:xfrm>
-            <a:off x="4919472" y="2216912"/>
-            <a:ext cx="6437376" cy="3247136"/>
-          </a:xfrm>
-          <a:prstGeom prst="rect">
-            <a:avLst/>
-          </a:prstGeom>
-        </p:spPr>
-      </p:pic>
-    </p:spTree>
-  </p:cSld>
-  <p:clrMapOvr>
-    <a:masterClrMapping/>
-  </p:clrMapOvr>
-</p:sld>
-</file>
-
-<file path=ppt/slides/slide8.xml><?xml version="1.0" encoding="utf-8"?>
-<p:sld xmlns:a="http://schemas.openxmlformats.org/drawingml/2006/main" xmlns:p="http://schemas.openxmlformats.org/presentationml/2006/main" xmlns:r="http://schemas.openxmlformats.org/officeDocument/2006/relationships">
-  <p:cSld>
-    <p:bg>
-      <p:bgPr>
-        <a:solidFill>
-          <a:srgbClr val="0F172A"/>
-        </a:solidFill>
-        <a:effectLst/>
-      </p:bgPr>
-    </p:bg>
-    <p:spTree>
-      <p:nvGrpSpPr>
-        <p:cNvPr id="1" name=""/>
-        <p:cNvGrpSpPr/>
-        <p:nvPr/>
-      </p:nvGrpSpPr>
-      <p:grpSpPr/>
-      <p:sp>
-        <p:nvSpPr>
-          <p:cNvPr id="2" name="Rectangle 1"/>
-          <p:cNvSpPr/>
-          <p:nvPr/>
-        </p:nvSpPr>
-        <p:spPr>
-          <a:xfrm>
-            <a:off x="0" y="0"/>
-            <a:ext cx="12191695" cy="109728"/>
-          </a:xfrm>
-          <a:prstGeom prst="rect">
-            <a:avLst/>
-          </a:prstGeom>
-          <a:solidFill>
-            <a:srgbClr val="3BA55C"/>
-          </a:solidFill>
-          <a:ln>
-            <a:noFill/>
-          </a:ln>
-        </p:spPr>
-        <p:style>
-          <a:lnRef idx="1">
-            <a:schemeClr val="accent1"/>
-          </a:lnRef>
-          <a:fillRef idx="3">
-            <a:schemeClr val="accent1"/>
-          </a:fillRef>
-          <a:effectRef idx="2">
-            <a:schemeClr val="accent1"/>
-          </a:effectRef>
-          <a:fontRef idx="minor">
-            <a:schemeClr val="lt1"/>
-          </a:fontRef>
-        </p:style>
-        <p:txBody>
-          <a:bodyPr rtlCol="0" anchor="ctr"/>
-          <a:lstStyle/>
-          <a:p>
-            <a:pPr algn="ctr"/>
-          </a:p>
-        </p:txBody>
-      </p:sp>
-      <p:sp>
-        <p:nvSpPr>
-          <p:cNvPr id="3" name="TextBox 2"/>
-          <p:cNvSpPr txBox="1"/>
-          <p:nvPr/>
-        </p:nvSpPr>
-        <p:spPr>
-          <a:xfrm>
-            <a:off x="731520" y="1097280"/>
-            <a:ext cx="10698480" cy="5029200"/>
-          </a:xfrm>
-          <a:prstGeom prst="rect">
-            <a:avLst/>
-          </a:prstGeom>
-          <a:noFill/>
-        </p:spPr>
-        <p:txBody>
-          <a:bodyPr wrap="square">
-            <a:spAutoFit/>
-          </a:bodyPr>
-          <a:lstStyle/>
-          <a:p>
-            <a:pPr>
-              <a:defRPr sz="3600" b="1">
-                <a:solidFill>
-                  <a:srgbClr val="F1F5F9"/>
-                </a:solidFill>
-                <a:latin typeface="Arial"/>
-              </a:defRPr>
-            </a:pPr>
-            <a:r>
-              <a:t>Certified System Readiness</a:t>
-            </a:r>
-          </a:p>
-          <a:p>
-            <a:pPr>
-              <a:spcBef>
-                <a:spcPts val="800"/>
-              </a:spcBef>
-              <a:defRPr sz="1800" b="1">
-                <a:solidFill>
-                  <a:srgbClr val="3BA55C"/>
-                </a:solidFill>
-                <a:latin typeface="Arial"/>
-              </a:defRPr>
-            </a:pPr>
-            <a:r>
-              <a:t>Ready for Official Bea Cukai Audit &amp; INSW Production Deployment</a:t>
-            </a:r>
-          </a:p>
-          <a:p>
-            <a:pPr>
-              <a:spcBef>
-                <a:spcPts val="1400"/>
-              </a:spcBef>
-              <a:defRPr sz="1600">
-                <a:solidFill>
-                  <a:srgbClr val="E2E8F0"/>
-                </a:solidFill>
-                <a:latin typeface="Arial"/>
-              </a:defRPr>
-            </a:pPr>
-            <a:r>
-              <a:t>✔  100% Compliant with Bea Cukai PER-24/BC/2023 &amp; PER-09/BC/2014.</a:t>
-            </a:r>
-          </a:p>
-          <a:p>
-            <a:pPr>
-              <a:spcBef>
-                <a:spcPts val="1400"/>
-              </a:spcBef>
-              <a:defRPr sz="1600">
-                <a:solidFill>
-                  <a:srgbClr val="E2E8F0"/>
-                </a:solidFill>
-                <a:latin typeface="Arial"/>
-              </a:defRPr>
-            </a:pPr>
-            <a:r>
-              <a:t>✔  Automated PDF Extractor + Smart Category 1-8 Classifier.</a:t>
-            </a:r>
-          </a:p>
-          <a:p>
-            <a:pPr>
-              <a:spcBef>
-                <a:spcPts val="1400"/>
-              </a:spcBef>
-              <a:defRPr sz="1600">
-                <a:solidFill>
-                  <a:srgbClr val="E2E8F0"/>
-                </a:solidFill>
-                <a:latin typeface="Arial"/>
-              </a:defRPr>
-            </a:pPr>
-            <a:r>
-              <a:t>✔  ERP AXDB Synchronization for Stock Opname (32) &amp; Adjustment (33).</a:t>
-            </a:r>
-          </a:p>
-          <a:p>
-            <a:pPr>
-              <a:spcBef>
-                <a:spcPts val="1400"/>
-              </a:spcBef>
-              <a:defRPr sz="1600">
-                <a:solidFill>
-                  <a:srgbClr val="E2E8F0"/>
-                </a:solidFill>
-                <a:latin typeface="Arial"/>
-              </a:defRPr>
-            </a:pPr>
-            <a:r>
-              <a:t>✔  05:00 AM Daily Cut-off Operational Window Calculation.</a:t>
-            </a:r>
-          </a:p>
-          <a:p>
-            <a:pPr>
-              <a:spcBef>
-                <a:spcPts val="1400"/>
-              </a:spcBef>
-              <a:defRPr sz="1600">
-                <a:solidFill>
-                  <a:srgbClr val="E2E8F0"/>
-                </a:solidFill>
-                <a:latin typeface="Arial"/>
-              </a:defRPr>
-            </a:pPr>
-            <a:r>
-              <a:t>✔  Complete Push Log Audit Trail &amp; Production Build Verified.</a:t>
+              <a:defRPr sz="1400">
+                <a:solidFill>
+                  <a:srgbClr val="94A3B8"/>
+                </a:solidFill>
+                <a:latin typeface="Segoe UI"/>
+              </a:defRPr>
+            </a:pPr>
+            <a:r>
+              <a:t>LIVE RETRIEVAL DEMO &amp; EXECUTIVE Q&amp;A</a:t>
+            </a:r>
+          </a:p>
+          <a:p>
+            <a:pPr>
+              <a:defRPr sz="1500">
+                <a:solidFill>
+                  <a:srgbClr val="FFFFFF"/>
+                </a:solidFill>
+                <a:latin typeface="Segoe UI"/>
+              </a:defRPr>
+            </a:pPr>
+            <a:r>
+              <a:t>1. Kính mời Cán bộ Hải quan / BGD chọn 1 Mã vật tư hoặc Số tờ khai bất kỳ.</a:t>
+            </a:r>
+          </a:p>
+          <a:p>
+            <a:pPr>
+              <a:defRPr sz="1500">
+                <a:solidFill>
+                  <a:srgbClr val="FFFFFF"/>
+                </a:solidFill>
+                <a:latin typeface="Segoe UI"/>
+              </a:defRPr>
+            </a:pPr>
+            <a:r>
+              <a:t>2. Nhập vào thanh Tìm kiếm (Search Bar) trên giao diện IT Inventory.</a:t>
+            </a:r>
+          </a:p>
+          <a:p>
+            <a:pPr>
+              <a:defRPr sz="1500">
+                <a:solidFill>
+                  <a:srgbClr val="FFFFFF"/>
+                </a:solidFill>
+                <a:latin typeface="Segoe UI"/>
+              </a:defRPr>
+            </a:pPr>
+            <a:r>
+              <a:t>3. Hệ thống trả về tức thì toàn bộ HS Code, ĐVT, Số lượng &amp; Trạng thái kho trong 2 giây.</a:t>
+            </a:r>
+          </a:p>
+          <a:p>
+            <a:pPr>
+              <a:defRPr sz="1500">
+                <a:solidFill>
+                  <a:srgbClr val="FFFFFF"/>
+                </a:solidFill>
+                <a:latin typeface="Segoe UI"/>
+              </a:defRPr>
+            </a:pPr>
+            <a:r>
+              <a:t>4. Xin chân thành cảm ơn sự lắng nghe của Đoàn kiểm tra!</a:t>
             </a:r>
           </a:p>
         </p:txBody>
